--- a/docs/AutoBench.pptx
+++ b/docs/AutoBench.pptx
@@ -19205,7 +19205,7 @@
                 </a:solidFill>
                 <a:latin typeface="Calibri"/>
               </a:rPr>
-              <a:t>shared LLM gateway   ·   ete-litellm / litemaas   (external)</a:t>
+              <a:t>LLM gateway (per instance)   ·   ete-litellm   ·   external for OCP / internal vpc-int for KinD</a:t>
             </a:r>
           </a:p>
         </p:txBody>

--- a/docs/AutoBench.pptx
+++ b/docs/AutoBench.pptx
@@ -3324,6 +3324,45 @@
           </a:p>
         </p:txBody>
       </p:sp>
+      <p:sp>
+        <p:nvSpPr>
+          <p:cNvPr id="7" name="TextBox 6"/>
+          <p:cNvSpPr txBox="1"/>
+          <p:nvPr/>
+        </p:nvSpPr>
+        <p:spPr>
+          <a:xfrm>
+            <a:off x="11292840" y="310896"/>
+            <a:ext cx="640080" cy="310896"/>
+          </a:xfrm>
+          <a:prstGeom prst="rect">
+            <a:avLst/>
+          </a:prstGeom>
+          <a:noFill/>
+        </p:spPr>
+        <p:txBody>
+          <a:bodyPr wrap="square" anchor="t">
+            <a:spAutoFit/>
+          </a:bodyPr>
+          <a:lstStyle/>
+          <a:p>
+            <a:pPr algn="r">
+              <a:spcAft>
+                <a:spcPts val="300"/>
+              </a:spcAft>
+            </a:pPr>
+            <a:r>
+              <a:rPr sz="1200" b="0" i="0">
+                <a:solidFill>
+                  <a:srgbClr val="C9D9EC"/>
+                </a:solidFill>
+                <a:latin typeface="Calibri"/>
+              </a:rPr>
+              <a:t>1</a:t>
+            </a:r>
+          </a:p>
+        </p:txBody>
+      </p:sp>
     </p:spTree>
   </p:cSld>
   <p:clrMapOvr>
@@ -4419,6 +4458,45 @@
           </a:graphicData>
         </a:graphic>
       </p:graphicFrame>
+      <p:sp>
+        <p:nvSpPr>
+          <p:cNvPr id="13" name="TextBox 12"/>
+          <p:cNvSpPr txBox="1"/>
+          <p:nvPr/>
+        </p:nvSpPr>
+        <p:spPr>
+          <a:xfrm>
+            <a:off x="11292840" y="310896"/>
+            <a:ext cx="640080" cy="310896"/>
+          </a:xfrm>
+          <a:prstGeom prst="rect">
+            <a:avLst/>
+          </a:prstGeom>
+          <a:noFill/>
+        </p:spPr>
+        <p:txBody>
+          <a:bodyPr wrap="square" anchor="t">
+            <a:spAutoFit/>
+          </a:bodyPr>
+          <a:lstStyle/>
+          <a:p>
+            <a:pPr algn="r">
+              <a:spcAft>
+                <a:spcPts val="300"/>
+              </a:spcAft>
+            </a:pPr>
+            <a:r>
+              <a:rPr sz="1200" b="0" i="0">
+                <a:solidFill>
+                  <a:srgbClr val="C9D9EC"/>
+                </a:solidFill>
+                <a:latin typeface="Calibri"/>
+              </a:rPr>
+              <a:t>10</a:t>
+            </a:r>
+          </a:p>
+        </p:txBody>
+      </p:sp>
     </p:spTree>
   </p:cSld>
   <p:clrMapOvr>
@@ -4832,6 +4910,45 @@
                 <a:latin typeface="Calibri"/>
               </a:rPr>
               <a:t>A run takes the first max_tasks tasks, so the same task_id is the same task across runs and clusters, and a smaller run is a prefix of a larger one. That is what makes cross-platform comparison like-for-like — six legs matched to the byte.</a:t>
+            </a:r>
+          </a:p>
+        </p:txBody>
+      </p:sp>
+      <p:sp>
+        <p:nvSpPr>
+          <p:cNvPr id="8" name="TextBox 7"/>
+          <p:cNvSpPr txBox="1"/>
+          <p:nvPr/>
+        </p:nvSpPr>
+        <p:spPr>
+          <a:xfrm>
+            <a:off x="11292840" y="310896"/>
+            <a:ext cx="640080" cy="310896"/>
+          </a:xfrm>
+          <a:prstGeom prst="rect">
+            <a:avLst/>
+          </a:prstGeom>
+          <a:noFill/>
+        </p:spPr>
+        <p:txBody>
+          <a:bodyPr wrap="square" anchor="t">
+            <a:spAutoFit/>
+          </a:bodyPr>
+          <a:lstStyle/>
+          <a:p>
+            <a:pPr algn="r">
+              <a:spcAft>
+                <a:spcPts val="300"/>
+              </a:spcAft>
+            </a:pPr>
+            <a:r>
+              <a:rPr sz="1200" b="0" i="0">
+                <a:solidFill>
+                  <a:srgbClr val="C9D9EC"/>
+                </a:solidFill>
+                <a:latin typeface="Calibri"/>
+              </a:rPr>
+              <a:t>11</a:t>
             </a:r>
           </a:p>
         </p:txBody>
@@ -6523,6 +6640,45 @@
           </a:p>
         </p:txBody>
       </p:sp>
+      <p:sp>
+        <p:nvSpPr>
+          <p:cNvPr id="5" name="TextBox 4"/>
+          <p:cNvSpPr txBox="1"/>
+          <p:nvPr/>
+        </p:nvSpPr>
+        <p:spPr>
+          <a:xfrm>
+            <a:off x="11292840" y="310896"/>
+            <a:ext cx="640080" cy="310896"/>
+          </a:xfrm>
+          <a:prstGeom prst="rect">
+            <a:avLst/>
+          </a:prstGeom>
+          <a:noFill/>
+        </p:spPr>
+        <p:txBody>
+          <a:bodyPr wrap="square" anchor="t">
+            <a:spAutoFit/>
+          </a:bodyPr>
+          <a:lstStyle/>
+          <a:p>
+            <a:pPr algn="r">
+              <a:spcAft>
+                <a:spcPts val="300"/>
+              </a:spcAft>
+            </a:pPr>
+            <a:r>
+              <a:rPr sz="1200" b="0" i="0">
+                <a:solidFill>
+                  <a:srgbClr val="C9D9EC"/>
+                </a:solidFill>
+                <a:latin typeface="Calibri"/>
+              </a:rPr>
+              <a:t>12</a:t>
+            </a:r>
+          </a:p>
+        </p:txBody>
+      </p:sp>
     </p:spTree>
   </p:cSld>
   <p:clrMapOvr>
@@ -8486,6 +8642,45 @@
                 <a:latin typeface="Calibri"/>
               </a:rPr>
               <a:t>over 5,438 s of wall time — appworld alone is 71% of the input, on 25 of 138 tasks.</a:t>
+            </a:r>
+          </a:p>
+        </p:txBody>
+      </p:sp>
+      <p:sp>
+        <p:nvSpPr>
+          <p:cNvPr id="9" name="TextBox 8"/>
+          <p:cNvSpPr txBox="1"/>
+          <p:nvPr/>
+        </p:nvSpPr>
+        <p:spPr>
+          <a:xfrm>
+            <a:off x="11292840" y="310896"/>
+            <a:ext cx="640080" cy="310896"/>
+          </a:xfrm>
+          <a:prstGeom prst="rect">
+            <a:avLst/>
+          </a:prstGeom>
+          <a:noFill/>
+        </p:spPr>
+        <p:txBody>
+          <a:bodyPr wrap="square" anchor="t">
+            <a:spAutoFit/>
+          </a:bodyPr>
+          <a:lstStyle/>
+          <a:p>
+            <a:pPr algn="r">
+              <a:spcAft>
+                <a:spcPts val="300"/>
+              </a:spcAft>
+            </a:pPr>
+            <a:r>
+              <a:rPr sz="1200" b="0" i="0">
+                <a:solidFill>
+                  <a:srgbClr val="C9D9EC"/>
+                </a:solidFill>
+                <a:latin typeface="Calibri"/>
+              </a:rPr>
+              <a:t>13</a:t>
             </a:r>
           </a:p>
         </p:txBody>
@@ -11057,6 +11252,45 @@
           </a:p>
         </p:txBody>
       </p:sp>
+      <p:sp>
+        <p:nvSpPr>
+          <p:cNvPr id="9" name="TextBox 8"/>
+          <p:cNvSpPr txBox="1"/>
+          <p:nvPr/>
+        </p:nvSpPr>
+        <p:spPr>
+          <a:xfrm>
+            <a:off x="11292840" y="310896"/>
+            <a:ext cx="640080" cy="310896"/>
+          </a:xfrm>
+          <a:prstGeom prst="rect">
+            <a:avLst/>
+          </a:prstGeom>
+          <a:noFill/>
+        </p:spPr>
+        <p:txBody>
+          <a:bodyPr wrap="square" anchor="t">
+            <a:spAutoFit/>
+          </a:bodyPr>
+          <a:lstStyle/>
+          <a:p>
+            <a:pPr algn="r">
+              <a:spcAft>
+                <a:spcPts val="300"/>
+              </a:spcAft>
+            </a:pPr>
+            <a:r>
+              <a:rPr sz="1200" b="0" i="0">
+                <a:solidFill>
+                  <a:srgbClr val="C9D9EC"/>
+                </a:solidFill>
+                <a:latin typeface="Calibri"/>
+              </a:rPr>
+              <a:t>14</a:t>
+            </a:r>
+          </a:p>
+        </p:txBody>
+      </p:sp>
     </p:spTree>
   </p:cSld>
   <p:clrMapOvr>
@@ -12122,6 +12356,45 @@
           </a:p>
         </p:txBody>
       </p:sp>
+      <p:sp>
+        <p:nvSpPr>
+          <p:cNvPr id="9" name="TextBox 8"/>
+          <p:cNvSpPr txBox="1"/>
+          <p:nvPr/>
+        </p:nvSpPr>
+        <p:spPr>
+          <a:xfrm>
+            <a:off x="11292840" y="310896"/>
+            <a:ext cx="640080" cy="310896"/>
+          </a:xfrm>
+          <a:prstGeom prst="rect">
+            <a:avLst/>
+          </a:prstGeom>
+          <a:noFill/>
+        </p:spPr>
+        <p:txBody>
+          <a:bodyPr wrap="square" anchor="t">
+            <a:spAutoFit/>
+          </a:bodyPr>
+          <a:lstStyle/>
+          <a:p>
+            <a:pPr algn="r">
+              <a:spcAft>
+                <a:spcPts val="300"/>
+              </a:spcAft>
+            </a:pPr>
+            <a:r>
+              <a:rPr sz="1200" b="0" i="0">
+                <a:solidFill>
+                  <a:srgbClr val="C9D9EC"/>
+                </a:solidFill>
+                <a:latin typeface="Calibri"/>
+              </a:rPr>
+              <a:t>15</a:t>
+            </a:r>
+          </a:p>
+        </p:txBody>
+      </p:sp>
     </p:spTree>
   </p:cSld>
   <p:clrMapOvr>
@@ -12687,6 +12960,45 @@
           </a:p>
         </p:txBody>
       </p:sp>
+      <p:sp>
+        <p:nvSpPr>
+          <p:cNvPr id="8" name="TextBox 7"/>
+          <p:cNvSpPr txBox="1"/>
+          <p:nvPr/>
+        </p:nvSpPr>
+        <p:spPr>
+          <a:xfrm>
+            <a:off x="11292840" y="310896"/>
+            <a:ext cx="640080" cy="310896"/>
+          </a:xfrm>
+          <a:prstGeom prst="rect">
+            <a:avLst/>
+          </a:prstGeom>
+          <a:noFill/>
+        </p:spPr>
+        <p:txBody>
+          <a:bodyPr wrap="square" anchor="t">
+            <a:spAutoFit/>
+          </a:bodyPr>
+          <a:lstStyle/>
+          <a:p>
+            <a:pPr algn="r">
+              <a:spcAft>
+                <a:spcPts val="300"/>
+              </a:spcAft>
+            </a:pPr>
+            <a:r>
+              <a:rPr sz="1200" b="0" i="0">
+                <a:solidFill>
+                  <a:srgbClr val="C9D9EC"/>
+                </a:solidFill>
+                <a:latin typeface="Calibri"/>
+              </a:rPr>
+              <a:t>16</a:t>
+            </a:r>
+          </a:p>
+        </p:txBody>
+      </p:sp>
     </p:spTree>
   </p:cSld>
   <p:clrMapOvr>
@@ -14135,6 +14447,45 @@
           </a:fontRef>
         </p:style>
       </p:cxnSp>
+      <p:sp>
+        <p:nvSpPr>
+          <p:cNvPr id="34" name="TextBox 33"/>
+          <p:cNvSpPr txBox="1"/>
+          <p:nvPr/>
+        </p:nvSpPr>
+        <p:spPr>
+          <a:xfrm>
+            <a:off x="11292840" y="310896"/>
+            <a:ext cx="640080" cy="310896"/>
+          </a:xfrm>
+          <a:prstGeom prst="rect">
+            <a:avLst/>
+          </a:prstGeom>
+          <a:noFill/>
+        </p:spPr>
+        <p:txBody>
+          <a:bodyPr wrap="square" anchor="t">
+            <a:spAutoFit/>
+          </a:bodyPr>
+          <a:lstStyle/>
+          <a:p>
+            <a:pPr algn="r">
+              <a:spcAft>
+                <a:spcPts val="300"/>
+              </a:spcAft>
+            </a:pPr>
+            <a:r>
+              <a:rPr sz="1200" b="0" i="0">
+                <a:solidFill>
+                  <a:srgbClr val="C9D9EC"/>
+                </a:solidFill>
+                <a:latin typeface="Calibri"/>
+              </a:rPr>
+              <a:t>2</a:t>
+            </a:r>
+          </a:p>
+        </p:txBody>
+      </p:sp>
     </p:spTree>
   </p:cSld>
   <p:clrMapOvr>
@@ -15016,6 +15367,45 @@
           </a:p>
         </p:txBody>
       </p:sp>
+      <p:sp>
+        <p:nvSpPr>
+          <p:cNvPr id="13" name="TextBox 12"/>
+          <p:cNvSpPr txBox="1"/>
+          <p:nvPr/>
+        </p:nvSpPr>
+        <p:spPr>
+          <a:xfrm>
+            <a:off x="11292840" y="310896"/>
+            <a:ext cx="640080" cy="310896"/>
+          </a:xfrm>
+          <a:prstGeom prst="rect">
+            <a:avLst/>
+          </a:prstGeom>
+          <a:noFill/>
+        </p:spPr>
+        <p:txBody>
+          <a:bodyPr wrap="square" anchor="t">
+            <a:spAutoFit/>
+          </a:bodyPr>
+          <a:lstStyle/>
+          <a:p>
+            <a:pPr algn="r">
+              <a:spcAft>
+                <a:spcPts val="300"/>
+              </a:spcAft>
+            </a:pPr>
+            <a:r>
+              <a:rPr sz="1200" b="0" i="0">
+                <a:solidFill>
+                  <a:srgbClr val="C9D9EC"/>
+                </a:solidFill>
+                <a:latin typeface="Calibri"/>
+              </a:rPr>
+              <a:t>3</a:t>
+            </a:r>
+          </a:p>
+        </p:txBody>
+      </p:sp>
     </p:spTree>
   </p:cSld>
   <p:clrMapOvr>
@@ -16707,6 +17097,45 @@
           </a:p>
         </p:txBody>
       </p:sp>
+      <p:sp>
+        <p:nvSpPr>
+          <p:cNvPr id="35" name="TextBox 34"/>
+          <p:cNvSpPr txBox="1"/>
+          <p:nvPr/>
+        </p:nvSpPr>
+        <p:spPr>
+          <a:xfrm>
+            <a:off x="11292840" y="310896"/>
+            <a:ext cx="640080" cy="310896"/>
+          </a:xfrm>
+          <a:prstGeom prst="rect">
+            <a:avLst/>
+          </a:prstGeom>
+          <a:noFill/>
+        </p:spPr>
+        <p:txBody>
+          <a:bodyPr wrap="square" anchor="t">
+            <a:spAutoFit/>
+          </a:bodyPr>
+          <a:lstStyle/>
+          <a:p>
+            <a:pPr algn="r">
+              <a:spcAft>
+                <a:spcPts val="300"/>
+              </a:spcAft>
+            </a:pPr>
+            <a:r>
+              <a:rPr sz="1200" b="0" i="0">
+                <a:solidFill>
+                  <a:srgbClr val="C9D9EC"/>
+                </a:solidFill>
+                <a:latin typeface="Calibri"/>
+              </a:rPr>
+              <a:t>4</a:t>
+            </a:r>
+          </a:p>
+        </p:txBody>
+      </p:sp>
     </p:spTree>
   </p:cSld>
   <p:clrMapOvr>
@@ -19073,6 +19502,45 @@
           </a:p>
         </p:txBody>
       </p:sp>
+      <p:sp>
+        <p:nvSpPr>
+          <p:cNvPr id="45" name="TextBox 44"/>
+          <p:cNvSpPr txBox="1"/>
+          <p:nvPr/>
+        </p:nvSpPr>
+        <p:spPr>
+          <a:xfrm>
+            <a:off x="11292840" y="310896"/>
+            <a:ext cx="640080" cy="310896"/>
+          </a:xfrm>
+          <a:prstGeom prst="rect">
+            <a:avLst/>
+          </a:prstGeom>
+          <a:noFill/>
+        </p:spPr>
+        <p:txBody>
+          <a:bodyPr wrap="square" anchor="t">
+            <a:spAutoFit/>
+          </a:bodyPr>
+          <a:lstStyle/>
+          <a:p>
+            <a:pPr algn="r">
+              <a:spcAft>
+                <a:spcPts val="300"/>
+              </a:spcAft>
+            </a:pPr>
+            <a:r>
+              <a:rPr sz="1200" b="0" i="0">
+                <a:solidFill>
+                  <a:srgbClr val="C9D9EC"/>
+                </a:solidFill>
+                <a:latin typeface="Calibri"/>
+              </a:rPr>
+              <a:t>5</a:t>
+            </a:r>
+          </a:p>
+        </p:txBody>
+      </p:sp>
     </p:spTree>
   </p:cSld>
   <p:clrMapOvr>
@@ -21778,6 +22246,45 @@
           </a:p>
         </p:txBody>
       </p:sp>
+      <p:sp>
+        <p:nvSpPr>
+          <p:cNvPr id="58" name="TextBox 57"/>
+          <p:cNvSpPr txBox="1"/>
+          <p:nvPr/>
+        </p:nvSpPr>
+        <p:spPr>
+          <a:xfrm>
+            <a:off x="11292840" y="310896"/>
+            <a:ext cx="640080" cy="310896"/>
+          </a:xfrm>
+          <a:prstGeom prst="rect">
+            <a:avLst/>
+          </a:prstGeom>
+          <a:noFill/>
+        </p:spPr>
+        <p:txBody>
+          <a:bodyPr wrap="square" anchor="t">
+            <a:spAutoFit/>
+          </a:bodyPr>
+          <a:lstStyle/>
+          <a:p>
+            <a:pPr algn="r">
+              <a:spcAft>
+                <a:spcPts val="300"/>
+              </a:spcAft>
+            </a:pPr>
+            <a:r>
+              <a:rPr sz="1200" b="0" i="0">
+                <a:solidFill>
+                  <a:srgbClr val="C9D9EC"/>
+                </a:solidFill>
+                <a:latin typeface="Calibri"/>
+              </a:rPr>
+              <a:t>6</a:t>
+            </a:r>
+          </a:p>
+        </p:txBody>
+      </p:sp>
     </p:spTree>
   </p:cSld>
   <p:clrMapOvr>
@@ -22279,6 +22786,45 @@
           </a:p>
         </p:txBody>
       </p:sp>
+      <p:sp>
+        <p:nvSpPr>
+          <p:cNvPr id="8" name="TextBox 7"/>
+          <p:cNvSpPr txBox="1"/>
+          <p:nvPr/>
+        </p:nvSpPr>
+        <p:spPr>
+          <a:xfrm>
+            <a:off x="11292840" y="310896"/>
+            <a:ext cx="640080" cy="310896"/>
+          </a:xfrm>
+          <a:prstGeom prst="rect">
+            <a:avLst/>
+          </a:prstGeom>
+          <a:noFill/>
+        </p:spPr>
+        <p:txBody>
+          <a:bodyPr wrap="square" anchor="t">
+            <a:spAutoFit/>
+          </a:bodyPr>
+          <a:lstStyle/>
+          <a:p>
+            <a:pPr algn="r">
+              <a:spcAft>
+                <a:spcPts val="300"/>
+              </a:spcAft>
+            </a:pPr>
+            <a:r>
+              <a:rPr sz="1200" b="0" i="0">
+                <a:solidFill>
+                  <a:srgbClr val="C9D9EC"/>
+                </a:solidFill>
+                <a:latin typeface="Calibri"/>
+              </a:rPr>
+              <a:t>7</a:t>
+            </a:r>
+          </a:p>
+        </p:txBody>
+      </p:sp>
     </p:spTree>
   </p:cSld>
   <p:clrMapOvr>
@@ -23280,6 +23826,45 @@
           </a:fontRef>
         </p:style>
       </p:cxnSp>
+      <p:sp>
+        <p:nvSpPr>
+          <p:cNvPr id="20" name="TextBox 19"/>
+          <p:cNvSpPr txBox="1"/>
+          <p:nvPr/>
+        </p:nvSpPr>
+        <p:spPr>
+          <a:xfrm>
+            <a:off x="11292840" y="310896"/>
+            <a:ext cx="640080" cy="310896"/>
+          </a:xfrm>
+          <a:prstGeom prst="rect">
+            <a:avLst/>
+          </a:prstGeom>
+          <a:noFill/>
+        </p:spPr>
+        <p:txBody>
+          <a:bodyPr wrap="square" anchor="t">
+            <a:spAutoFit/>
+          </a:bodyPr>
+          <a:lstStyle/>
+          <a:p>
+            <a:pPr algn="r">
+              <a:spcAft>
+                <a:spcPts val="300"/>
+              </a:spcAft>
+            </a:pPr>
+            <a:r>
+              <a:rPr sz="1200" b="0" i="0">
+                <a:solidFill>
+                  <a:srgbClr val="C9D9EC"/>
+                </a:solidFill>
+                <a:latin typeface="Calibri"/>
+              </a:rPr>
+              <a:t>8</a:t>
+            </a:r>
+          </a:p>
+        </p:txBody>
+      </p:sp>
     </p:spTree>
   </p:cSld>
   <p:clrMapOvr>
@@ -24569,6 +25154,45 @@
                 <a:latin typeface="Calibri"/>
               </a:rPr>
               <a:t>The scale gap is the headline: a tau2 task costs ~240x the input tokens of a gsm8k task, an appworld task ~615x. A 50-task gsm8k run is minutes; a 20-task appworld run is half an hour and millions of tokens. Budget by benchmark, not by task count.</a:t>
+            </a:r>
+          </a:p>
+        </p:txBody>
+      </p:sp>
+      <p:sp>
+        <p:nvSpPr>
+          <p:cNvPr id="5" name="TextBox 4"/>
+          <p:cNvSpPr txBox="1"/>
+          <p:nvPr/>
+        </p:nvSpPr>
+        <p:spPr>
+          <a:xfrm>
+            <a:off x="11292840" y="310896"/>
+            <a:ext cx="640080" cy="310896"/>
+          </a:xfrm>
+          <a:prstGeom prst="rect">
+            <a:avLst/>
+          </a:prstGeom>
+          <a:noFill/>
+        </p:spPr>
+        <p:txBody>
+          <a:bodyPr wrap="square" anchor="t">
+            <a:spAutoFit/>
+          </a:bodyPr>
+          <a:lstStyle/>
+          <a:p>
+            <a:pPr algn="r">
+              <a:spcAft>
+                <a:spcPts val="300"/>
+              </a:spcAft>
+            </a:pPr>
+            <a:r>
+              <a:rPr sz="1200" b="0" i="0">
+                <a:solidFill>
+                  <a:srgbClr val="C9D9EC"/>
+                </a:solidFill>
+                <a:latin typeface="Calibri"/>
+              </a:rPr>
+              <a:t>9</a:t>
             </a:r>
           </a:p>
         </p:txBody>

--- a/docs/AutoBench.pptx
+++ b/docs/AutoBench.pptx
@@ -3332,8 +3332,8 @@
         </p:nvSpPr>
         <p:spPr>
           <a:xfrm>
-            <a:off x="11292840" y="310896"/>
-            <a:ext cx="640080" cy="310896"/>
+            <a:off x="822960" y="5715000"/>
+            <a:ext cx="10515600" cy="365760"/>
           </a:xfrm>
           <a:prstGeom prst="rect">
             <a:avLst/>
@@ -3342,6 +3342,45 @@
         </p:spPr>
         <p:txBody>
           <a:bodyPr wrap="square" anchor="t">
+            <a:spAutoFit/>
+          </a:bodyPr>
+          <a:lstStyle/>
+          <a:p>
+            <a:pPr algn="l">
+              <a:spcAft>
+                <a:spcPts val="300"/>
+              </a:spcAft>
+            </a:pPr>
+            <a:r>
+              <a:rPr sz="1200" b="0" i="0">
+                <a:solidFill>
+                  <a:srgbClr val="9AB4D0"/>
+                </a:solidFill>
+                <a:latin typeface="Calibri"/>
+              </a:rPr>
+              <a:t>Last modified 2026-09-09 14:41 EDT</a:t>
+            </a:r>
+          </a:p>
+        </p:txBody>
+      </p:sp>
+      <p:sp>
+        <p:nvSpPr>
+          <p:cNvPr id="8" name="TextBox 7"/>
+          <p:cNvSpPr txBox="1"/>
+          <p:nvPr/>
+        </p:nvSpPr>
+        <p:spPr>
+          <a:xfrm>
+            <a:off x="11109960" y="256032"/>
+            <a:ext cx="822960" cy="402336"/>
+          </a:xfrm>
+          <a:prstGeom prst="rect">
+            <a:avLst/>
+          </a:prstGeom>
+          <a:noFill/>
+        </p:spPr>
+        <p:txBody>
+          <a:bodyPr wrap="square" anchor="ctr">
             <a:spAutoFit/>
           </a:bodyPr>
           <a:lstStyle/>
@@ -3352,9 +3391,9 @@
               </a:spcAft>
             </a:pPr>
             <a:r>
-              <a:rPr sz="1200" b="0" i="0">
-                <a:solidFill>
-                  <a:srgbClr val="C9D9EC"/>
+              <a:rPr sz="1600" b="1" i="0">
+                <a:solidFill>
+                  <a:srgbClr val="FFFFFF"/>
                 </a:solidFill>
                 <a:latin typeface="Calibri"/>
               </a:rPr>
@@ -4466,8 +4505,8 @@
         </p:nvSpPr>
         <p:spPr>
           <a:xfrm>
-            <a:off x="11292840" y="310896"/>
-            <a:ext cx="640080" cy="310896"/>
+            <a:off x="11109960" y="256032"/>
+            <a:ext cx="822960" cy="402336"/>
           </a:xfrm>
           <a:prstGeom prst="rect">
             <a:avLst/>
@@ -4475,7 +4514,7 @@
           <a:noFill/>
         </p:spPr>
         <p:txBody>
-          <a:bodyPr wrap="square" anchor="t">
+          <a:bodyPr wrap="square" anchor="ctr">
             <a:spAutoFit/>
           </a:bodyPr>
           <a:lstStyle/>
@@ -4486,9 +4525,9 @@
               </a:spcAft>
             </a:pPr>
             <a:r>
-              <a:rPr sz="1200" b="0" i="0">
-                <a:solidFill>
-                  <a:srgbClr val="C9D9EC"/>
+              <a:rPr sz="1600" b="1" i="0">
+                <a:solidFill>
+                  <a:srgbClr val="FFFFFF"/>
                 </a:solidFill>
                 <a:latin typeface="Calibri"/>
               </a:rPr>
@@ -4922,8 +4961,8 @@
         </p:nvSpPr>
         <p:spPr>
           <a:xfrm>
-            <a:off x="11292840" y="310896"/>
-            <a:ext cx="640080" cy="310896"/>
+            <a:off x="11109960" y="256032"/>
+            <a:ext cx="822960" cy="402336"/>
           </a:xfrm>
           <a:prstGeom prst="rect">
             <a:avLst/>
@@ -4931,7 +4970,7 @@
           <a:noFill/>
         </p:spPr>
         <p:txBody>
-          <a:bodyPr wrap="square" anchor="t">
+          <a:bodyPr wrap="square" anchor="ctr">
             <a:spAutoFit/>
           </a:bodyPr>
           <a:lstStyle/>
@@ -4942,9 +4981,9 @@
               </a:spcAft>
             </a:pPr>
             <a:r>
-              <a:rPr sz="1200" b="0" i="0">
-                <a:solidFill>
-                  <a:srgbClr val="C9D9EC"/>
+              <a:rPr sz="1600" b="1" i="0">
+                <a:solidFill>
+                  <a:srgbClr val="FFFFFF"/>
                 </a:solidFill>
                 <a:latin typeface="Calibri"/>
               </a:rPr>
@@ -6648,8 +6687,8 @@
         </p:nvSpPr>
         <p:spPr>
           <a:xfrm>
-            <a:off x="11292840" y="310896"/>
-            <a:ext cx="640080" cy="310896"/>
+            <a:off x="11109960" y="256032"/>
+            <a:ext cx="822960" cy="402336"/>
           </a:xfrm>
           <a:prstGeom prst="rect">
             <a:avLst/>
@@ -6657,7 +6696,7 @@
           <a:noFill/>
         </p:spPr>
         <p:txBody>
-          <a:bodyPr wrap="square" anchor="t">
+          <a:bodyPr wrap="square" anchor="ctr">
             <a:spAutoFit/>
           </a:bodyPr>
           <a:lstStyle/>
@@ -6668,9 +6707,9 @@
               </a:spcAft>
             </a:pPr>
             <a:r>
-              <a:rPr sz="1200" b="0" i="0">
-                <a:solidFill>
-                  <a:srgbClr val="C9D9EC"/>
+              <a:rPr sz="1600" b="1" i="0">
+                <a:solidFill>
+                  <a:srgbClr val="FFFFFF"/>
                 </a:solidFill>
                 <a:latin typeface="Calibri"/>
               </a:rPr>
@@ -8654,8 +8693,8 @@
         </p:nvSpPr>
         <p:spPr>
           <a:xfrm>
-            <a:off x="11292840" y="310896"/>
-            <a:ext cx="640080" cy="310896"/>
+            <a:off x="11109960" y="256032"/>
+            <a:ext cx="822960" cy="402336"/>
           </a:xfrm>
           <a:prstGeom prst="rect">
             <a:avLst/>
@@ -8663,7 +8702,7 @@
           <a:noFill/>
         </p:spPr>
         <p:txBody>
-          <a:bodyPr wrap="square" anchor="t">
+          <a:bodyPr wrap="square" anchor="ctr">
             <a:spAutoFit/>
           </a:bodyPr>
           <a:lstStyle/>
@@ -8674,9 +8713,9 @@
               </a:spcAft>
             </a:pPr>
             <a:r>
-              <a:rPr sz="1200" b="0" i="0">
-                <a:solidFill>
-                  <a:srgbClr val="C9D9EC"/>
+              <a:rPr sz="1600" b="1" i="0">
+                <a:solidFill>
+                  <a:srgbClr val="FFFFFF"/>
                 </a:solidFill>
                 <a:latin typeface="Calibri"/>
               </a:rPr>
@@ -11260,8 +11299,8 @@
         </p:nvSpPr>
         <p:spPr>
           <a:xfrm>
-            <a:off x="11292840" y="310896"/>
-            <a:ext cx="640080" cy="310896"/>
+            <a:off x="11109960" y="256032"/>
+            <a:ext cx="822960" cy="402336"/>
           </a:xfrm>
           <a:prstGeom prst="rect">
             <a:avLst/>
@@ -11269,7 +11308,7 @@
           <a:noFill/>
         </p:spPr>
         <p:txBody>
-          <a:bodyPr wrap="square" anchor="t">
+          <a:bodyPr wrap="square" anchor="ctr">
             <a:spAutoFit/>
           </a:bodyPr>
           <a:lstStyle/>
@@ -11280,9 +11319,9 @@
               </a:spcAft>
             </a:pPr>
             <a:r>
-              <a:rPr sz="1200" b="0" i="0">
-                <a:solidFill>
-                  <a:srgbClr val="C9D9EC"/>
+              <a:rPr sz="1600" b="1" i="0">
+                <a:solidFill>
+                  <a:srgbClr val="FFFFFF"/>
                 </a:solidFill>
                 <a:latin typeface="Calibri"/>
               </a:rPr>
@@ -12364,8 +12403,8 @@
         </p:nvSpPr>
         <p:spPr>
           <a:xfrm>
-            <a:off x="11292840" y="310896"/>
-            <a:ext cx="640080" cy="310896"/>
+            <a:off x="11109960" y="256032"/>
+            <a:ext cx="822960" cy="402336"/>
           </a:xfrm>
           <a:prstGeom prst="rect">
             <a:avLst/>
@@ -12373,7 +12412,7 @@
           <a:noFill/>
         </p:spPr>
         <p:txBody>
-          <a:bodyPr wrap="square" anchor="t">
+          <a:bodyPr wrap="square" anchor="ctr">
             <a:spAutoFit/>
           </a:bodyPr>
           <a:lstStyle/>
@@ -12384,9 +12423,9 @@
               </a:spcAft>
             </a:pPr>
             <a:r>
-              <a:rPr sz="1200" b="0" i="0">
-                <a:solidFill>
-                  <a:srgbClr val="C9D9EC"/>
+              <a:rPr sz="1600" b="1" i="0">
+                <a:solidFill>
+                  <a:srgbClr val="FFFFFF"/>
                 </a:solidFill>
                 <a:latin typeface="Calibri"/>
               </a:rPr>
@@ -12968,8 +13007,8 @@
         </p:nvSpPr>
         <p:spPr>
           <a:xfrm>
-            <a:off x="11292840" y="310896"/>
-            <a:ext cx="640080" cy="310896"/>
+            <a:off x="11109960" y="256032"/>
+            <a:ext cx="822960" cy="402336"/>
           </a:xfrm>
           <a:prstGeom prst="rect">
             <a:avLst/>
@@ -12977,7 +13016,7 @@
           <a:noFill/>
         </p:spPr>
         <p:txBody>
-          <a:bodyPr wrap="square" anchor="t">
+          <a:bodyPr wrap="square" anchor="ctr">
             <a:spAutoFit/>
           </a:bodyPr>
           <a:lstStyle/>
@@ -12988,9 +13027,9 @@
               </a:spcAft>
             </a:pPr>
             <a:r>
-              <a:rPr sz="1200" b="0" i="0">
-                <a:solidFill>
-                  <a:srgbClr val="C9D9EC"/>
+              <a:rPr sz="1600" b="1" i="0">
+                <a:solidFill>
+                  <a:srgbClr val="FFFFFF"/>
                 </a:solidFill>
                 <a:latin typeface="Calibri"/>
               </a:rPr>
@@ -14455,8 +14494,8 @@
         </p:nvSpPr>
         <p:spPr>
           <a:xfrm>
-            <a:off x="11292840" y="310896"/>
-            <a:ext cx="640080" cy="310896"/>
+            <a:off x="11109960" y="256032"/>
+            <a:ext cx="822960" cy="402336"/>
           </a:xfrm>
           <a:prstGeom prst="rect">
             <a:avLst/>
@@ -14464,7 +14503,7 @@
           <a:noFill/>
         </p:spPr>
         <p:txBody>
-          <a:bodyPr wrap="square" anchor="t">
+          <a:bodyPr wrap="square" anchor="ctr">
             <a:spAutoFit/>
           </a:bodyPr>
           <a:lstStyle/>
@@ -14475,9 +14514,9 @@
               </a:spcAft>
             </a:pPr>
             <a:r>
-              <a:rPr sz="1200" b="0" i="0">
-                <a:solidFill>
-                  <a:srgbClr val="C9D9EC"/>
+              <a:rPr sz="1600" b="1" i="0">
+                <a:solidFill>
+                  <a:srgbClr val="FFFFFF"/>
                 </a:solidFill>
                 <a:latin typeface="Calibri"/>
               </a:rPr>
@@ -15375,8 +15414,8 @@
         </p:nvSpPr>
         <p:spPr>
           <a:xfrm>
-            <a:off x="11292840" y="310896"/>
-            <a:ext cx="640080" cy="310896"/>
+            <a:off x="11109960" y="256032"/>
+            <a:ext cx="822960" cy="402336"/>
           </a:xfrm>
           <a:prstGeom prst="rect">
             <a:avLst/>
@@ -15384,7 +15423,7 @@
           <a:noFill/>
         </p:spPr>
         <p:txBody>
-          <a:bodyPr wrap="square" anchor="t">
+          <a:bodyPr wrap="square" anchor="ctr">
             <a:spAutoFit/>
           </a:bodyPr>
           <a:lstStyle/>
@@ -15395,9 +15434,9 @@
               </a:spcAft>
             </a:pPr>
             <a:r>
-              <a:rPr sz="1200" b="0" i="0">
-                <a:solidFill>
-                  <a:srgbClr val="C9D9EC"/>
+              <a:rPr sz="1600" b="1" i="0">
+                <a:solidFill>
+                  <a:srgbClr val="FFFFFF"/>
                 </a:solidFill>
                 <a:latin typeface="Calibri"/>
               </a:rPr>
@@ -17105,8 +17144,8 @@
         </p:nvSpPr>
         <p:spPr>
           <a:xfrm>
-            <a:off x="11292840" y="310896"/>
-            <a:ext cx="640080" cy="310896"/>
+            <a:off x="11109960" y="256032"/>
+            <a:ext cx="822960" cy="402336"/>
           </a:xfrm>
           <a:prstGeom prst="rect">
             <a:avLst/>
@@ -17114,7 +17153,7 @@
           <a:noFill/>
         </p:spPr>
         <p:txBody>
-          <a:bodyPr wrap="square" anchor="t">
+          <a:bodyPr wrap="square" anchor="ctr">
             <a:spAutoFit/>
           </a:bodyPr>
           <a:lstStyle/>
@@ -17125,9 +17164,9 @@
               </a:spcAft>
             </a:pPr>
             <a:r>
-              <a:rPr sz="1200" b="0" i="0">
-                <a:solidFill>
-                  <a:srgbClr val="C9D9EC"/>
+              <a:rPr sz="1600" b="1" i="0">
+                <a:solidFill>
+                  <a:srgbClr val="FFFFFF"/>
                 </a:solidFill>
                 <a:latin typeface="Calibri"/>
               </a:rPr>
@@ -19510,8 +19549,8 @@
         </p:nvSpPr>
         <p:spPr>
           <a:xfrm>
-            <a:off x="11292840" y="310896"/>
-            <a:ext cx="640080" cy="310896"/>
+            <a:off x="11109960" y="256032"/>
+            <a:ext cx="822960" cy="402336"/>
           </a:xfrm>
           <a:prstGeom prst="rect">
             <a:avLst/>
@@ -19519,7 +19558,7 @@
           <a:noFill/>
         </p:spPr>
         <p:txBody>
-          <a:bodyPr wrap="square" anchor="t">
+          <a:bodyPr wrap="square" anchor="ctr">
             <a:spAutoFit/>
           </a:bodyPr>
           <a:lstStyle/>
@@ -19530,9 +19569,9 @@
               </a:spcAft>
             </a:pPr>
             <a:r>
-              <a:rPr sz="1200" b="0" i="0">
-                <a:solidFill>
-                  <a:srgbClr val="C9D9EC"/>
+              <a:rPr sz="1600" b="1" i="0">
+                <a:solidFill>
+                  <a:srgbClr val="FFFFFF"/>
                 </a:solidFill>
                 <a:latin typeface="Calibri"/>
               </a:rPr>
@@ -22254,8 +22293,8 @@
         </p:nvSpPr>
         <p:spPr>
           <a:xfrm>
-            <a:off x="11292840" y="310896"/>
-            <a:ext cx="640080" cy="310896"/>
+            <a:off x="11109960" y="256032"/>
+            <a:ext cx="822960" cy="402336"/>
           </a:xfrm>
           <a:prstGeom prst="rect">
             <a:avLst/>
@@ -22263,7 +22302,7 @@
           <a:noFill/>
         </p:spPr>
         <p:txBody>
-          <a:bodyPr wrap="square" anchor="t">
+          <a:bodyPr wrap="square" anchor="ctr">
             <a:spAutoFit/>
           </a:bodyPr>
           <a:lstStyle/>
@@ -22274,9 +22313,9 @@
               </a:spcAft>
             </a:pPr>
             <a:r>
-              <a:rPr sz="1200" b="0" i="0">
-                <a:solidFill>
-                  <a:srgbClr val="C9D9EC"/>
+              <a:rPr sz="1600" b="1" i="0">
+                <a:solidFill>
+                  <a:srgbClr val="FFFFFF"/>
                 </a:solidFill>
                 <a:latin typeface="Calibri"/>
               </a:rPr>
@@ -22794,8 +22833,8 @@
         </p:nvSpPr>
         <p:spPr>
           <a:xfrm>
-            <a:off x="11292840" y="310896"/>
-            <a:ext cx="640080" cy="310896"/>
+            <a:off x="11109960" y="256032"/>
+            <a:ext cx="822960" cy="402336"/>
           </a:xfrm>
           <a:prstGeom prst="rect">
             <a:avLst/>
@@ -22803,7 +22842,7 @@
           <a:noFill/>
         </p:spPr>
         <p:txBody>
-          <a:bodyPr wrap="square" anchor="t">
+          <a:bodyPr wrap="square" anchor="ctr">
             <a:spAutoFit/>
           </a:bodyPr>
           <a:lstStyle/>
@@ -22814,9 +22853,9 @@
               </a:spcAft>
             </a:pPr>
             <a:r>
-              <a:rPr sz="1200" b="0" i="0">
-                <a:solidFill>
-                  <a:srgbClr val="C9D9EC"/>
+              <a:rPr sz="1600" b="1" i="0">
+                <a:solidFill>
+                  <a:srgbClr val="FFFFFF"/>
                 </a:solidFill>
                 <a:latin typeface="Calibri"/>
               </a:rPr>
@@ -23834,8 +23873,8 @@
         </p:nvSpPr>
         <p:spPr>
           <a:xfrm>
-            <a:off x="11292840" y="310896"/>
-            <a:ext cx="640080" cy="310896"/>
+            <a:off x="11109960" y="256032"/>
+            <a:ext cx="822960" cy="402336"/>
           </a:xfrm>
           <a:prstGeom prst="rect">
             <a:avLst/>
@@ -23843,7 +23882,7 @@
           <a:noFill/>
         </p:spPr>
         <p:txBody>
-          <a:bodyPr wrap="square" anchor="t">
+          <a:bodyPr wrap="square" anchor="ctr">
             <a:spAutoFit/>
           </a:bodyPr>
           <a:lstStyle/>
@@ -23854,9 +23893,9 @@
               </a:spcAft>
             </a:pPr>
             <a:r>
-              <a:rPr sz="1200" b="0" i="0">
-                <a:solidFill>
-                  <a:srgbClr val="C9D9EC"/>
+              <a:rPr sz="1600" b="1" i="0">
+                <a:solidFill>
+                  <a:srgbClr val="FFFFFF"/>
                 </a:solidFill>
                 <a:latin typeface="Calibri"/>
               </a:rPr>
@@ -25166,8 +25205,8 @@
         </p:nvSpPr>
         <p:spPr>
           <a:xfrm>
-            <a:off x="11292840" y="310896"/>
-            <a:ext cx="640080" cy="310896"/>
+            <a:off x="11109960" y="256032"/>
+            <a:ext cx="822960" cy="402336"/>
           </a:xfrm>
           <a:prstGeom prst="rect">
             <a:avLst/>
@@ -25175,7 +25214,7 @@
           <a:noFill/>
         </p:spPr>
         <p:txBody>
-          <a:bodyPr wrap="square" anchor="t">
+          <a:bodyPr wrap="square" anchor="ctr">
             <a:spAutoFit/>
           </a:bodyPr>
           <a:lstStyle/>
@@ -25186,9 +25225,9 @@
               </a:spcAft>
             </a:pPr>
             <a:r>
-              <a:rPr sz="1200" b="0" i="0">
-                <a:solidFill>
-                  <a:srgbClr val="C9D9EC"/>
+              <a:rPr sz="1600" b="1" i="0">
+                <a:solidFill>
+                  <a:srgbClr val="FFFFFF"/>
                 </a:solidFill>
                 <a:latin typeface="Calibri"/>
               </a:rPr>

--- a/docs/AutoBench.pptx
+++ b/docs/AutoBench.pptx
@@ -3358,7 +3358,7 @@
                 </a:solidFill>
                 <a:latin typeface="Calibri"/>
               </a:rPr>
-              <a:t>Last modified 2026-09-09 14:41 EDT</a:t>
+              <a:t>Last modified 2026-09-09 14:47 EDT</a:t>
             </a:r>
           </a:p>
         </p:txBody>
@@ -3371,8 +3371,8 @@
         </p:nvSpPr>
         <p:spPr>
           <a:xfrm>
-            <a:off x="11109960" y="256032"/>
-            <a:ext cx="822960" cy="402336"/>
+            <a:off x="11841480" y="6455664"/>
+            <a:ext cx="274320" cy="274320"/>
           </a:xfrm>
           <a:prstGeom prst="rect">
             <a:avLst/>
@@ -3391,7 +3391,7 @@
               </a:spcAft>
             </a:pPr>
             <a:r>
-              <a:rPr sz="1600" b="1" i="0">
+              <a:rPr sz="1200" b="0" i="0">
                 <a:solidFill>
                   <a:srgbClr val="FFFFFF"/>
                 </a:solidFill>
@@ -4505,8 +4505,8 @@
         </p:nvSpPr>
         <p:spPr>
           <a:xfrm>
-            <a:off x="11109960" y="256032"/>
-            <a:ext cx="822960" cy="402336"/>
+            <a:off x="11841480" y="6455664"/>
+            <a:ext cx="274320" cy="274320"/>
           </a:xfrm>
           <a:prstGeom prst="rect">
             <a:avLst/>
@@ -4525,9 +4525,9 @@
               </a:spcAft>
             </a:pPr>
             <a:r>
-              <a:rPr sz="1600" b="1" i="0">
-                <a:solidFill>
-                  <a:srgbClr val="FFFFFF"/>
+              <a:rPr sz="1200" b="0" i="0">
+                <a:solidFill>
+                  <a:srgbClr val="6B6B6B"/>
                 </a:solidFill>
                 <a:latin typeface="Calibri"/>
               </a:rPr>
@@ -4961,8 +4961,8 @@
         </p:nvSpPr>
         <p:spPr>
           <a:xfrm>
-            <a:off x="11109960" y="256032"/>
-            <a:ext cx="822960" cy="402336"/>
+            <a:off x="11841480" y="6455664"/>
+            <a:ext cx="274320" cy="274320"/>
           </a:xfrm>
           <a:prstGeom prst="rect">
             <a:avLst/>
@@ -4981,9 +4981,9 @@
               </a:spcAft>
             </a:pPr>
             <a:r>
-              <a:rPr sz="1600" b="1" i="0">
-                <a:solidFill>
-                  <a:srgbClr val="FFFFFF"/>
+              <a:rPr sz="1200" b="0" i="0">
+                <a:solidFill>
+                  <a:srgbClr val="6B6B6B"/>
                 </a:solidFill>
                 <a:latin typeface="Calibri"/>
               </a:rPr>
@@ -6687,8 +6687,8 @@
         </p:nvSpPr>
         <p:spPr>
           <a:xfrm>
-            <a:off x="11109960" y="256032"/>
-            <a:ext cx="822960" cy="402336"/>
+            <a:off x="11841480" y="6455664"/>
+            <a:ext cx="274320" cy="274320"/>
           </a:xfrm>
           <a:prstGeom prst="rect">
             <a:avLst/>
@@ -6707,9 +6707,9 @@
               </a:spcAft>
             </a:pPr>
             <a:r>
-              <a:rPr sz="1600" b="1" i="0">
-                <a:solidFill>
-                  <a:srgbClr val="FFFFFF"/>
+              <a:rPr sz="1200" b="0" i="0">
+                <a:solidFill>
+                  <a:srgbClr val="6B6B6B"/>
                 </a:solidFill>
                 <a:latin typeface="Calibri"/>
               </a:rPr>
@@ -8693,8 +8693,8 @@
         </p:nvSpPr>
         <p:spPr>
           <a:xfrm>
-            <a:off x="11109960" y="256032"/>
-            <a:ext cx="822960" cy="402336"/>
+            <a:off x="11841480" y="6455664"/>
+            <a:ext cx="274320" cy="274320"/>
           </a:xfrm>
           <a:prstGeom prst="rect">
             <a:avLst/>
@@ -8713,9 +8713,9 @@
               </a:spcAft>
             </a:pPr>
             <a:r>
-              <a:rPr sz="1600" b="1" i="0">
-                <a:solidFill>
-                  <a:srgbClr val="FFFFFF"/>
+              <a:rPr sz="1200" b="0" i="0">
+                <a:solidFill>
+                  <a:srgbClr val="6B6B6B"/>
                 </a:solidFill>
                 <a:latin typeface="Calibri"/>
               </a:rPr>
@@ -11299,8 +11299,8 @@
         </p:nvSpPr>
         <p:spPr>
           <a:xfrm>
-            <a:off x="11109960" y="256032"/>
-            <a:ext cx="822960" cy="402336"/>
+            <a:off x="11841480" y="6455664"/>
+            <a:ext cx="274320" cy="274320"/>
           </a:xfrm>
           <a:prstGeom prst="rect">
             <a:avLst/>
@@ -11319,9 +11319,9 @@
               </a:spcAft>
             </a:pPr>
             <a:r>
-              <a:rPr sz="1600" b="1" i="0">
-                <a:solidFill>
-                  <a:srgbClr val="FFFFFF"/>
+              <a:rPr sz="1200" b="0" i="0">
+                <a:solidFill>
+                  <a:srgbClr val="6B6B6B"/>
                 </a:solidFill>
                 <a:latin typeface="Calibri"/>
               </a:rPr>
@@ -12403,8 +12403,8 @@
         </p:nvSpPr>
         <p:spPr>
           <a:xfrm>
-            <a:off x="11109960" y="256032"/>
-            <a:ext cx="822960" cy="402336"/>
+            <a:off x="11841480" y="6455664"/>
+            <a:ext cx="274320" cy="274320"/>
           </a:xfrm>
           <a:prstGeom prst="rect">
             <a:avLst/>
@@ -12423,9 +12423,9 @@
               </a:spcAft>
             </a:pPr>
             <a:r>
-              <a:rPr sz="1600" b="1" i="0">
-                <a:solidFill>
-                  <a:srgbClr val="FFFFFF"/>
+              <a:rPr sz="1200" b="0" i="0">
+                <a:solidFill>
+                  <a:srgbClr val="6B6B6B"/>
                 </a:solidFill>
                 <a:latin typeface="Calibri"/>
               </a:rPr>
@@ -13007,8 +13007,8 @@
         </p:nvSpPr>
         <p:spPr>
           <a:xfrm>
-            <a:off x="11109960" y="256032"/>
-            <a:ext cx="822960" cy="402336"/>
+            <a:off x="11841480" y="6455664"/>
+            <a:ext cx="274320" cy="274320"/>
           </a:xfrm>
           <a:prstGeom prst="rect">
             <a:avLst/>
@@ -13027,9 +13027,9 @@
               </a:spcAft>
             </a:pPr>
             <a:r>
-              <a:rPr sz="1600" b="1" i="0">
-                <a:solidFill>
-                  <a:srgbClr val="FFFFFF"/>
+              <a:rPr sz="1200" b="0" i="0">
+                <a:solidFill>
+                  <a:srgbClr val="6B6B6B"/>
                 </a:solidFill>
                 <a:latin typeface="Calibri"/>
               </a:rPr>
@@ -14494,8 +14494,8 @@
         </p:nvSpPr>
         <p:spPr>
           <a:xfrm>
-            <a:off x="11109960" y="256032"/>
-            <a:ext cx="822960" cy="402336"/>
+            <a:off x="11841480" y="6455664"/>
+            <a:ext cx="274320" cy="274320"/>
           </a:xfrm>
           <a:prstGeom prst="rect">
             <a:avLst/>
@@ -14514,9 +14514,9 @@
               </a:spcAft>
             </a:pPr>
             <a:r>
-              <a:rPr sz="1600" b="1" i="0">
-                <a:solidFill>
-                  <a:srgbClr val="FFFFFF"/>
+              <a:rPr sz="1200" b="0" i="0">
+                <a:solidFill>
+                  <a:srgbClr val="6B6B6B"/>
                 </a:solidFill>
                 <a:latin typeface="Calibri"/>
               </a:rPr>
@@ -15414,8 +15414,8 @@
         </p:nvSpPr>
         <p:spPr>
           <a:xfrm>
-            <a:off x="11109960" y="256032"/>
-            <a:ext cx="822960" cy="402336"/>
+            <a:off x="11841480" y="6455664"/>
+            <a:ext cx="274320" cy="274320"/>
           </a:xfrm>
           <a:prstGeom prst="rect">
             <a:avLst/>
@@ -15434,9 +15434,9 @@
               </a:spcAft>
             </a:pPr>
             <a:r>
-              <a:rPr sz="1600" b="1" i="0">
-                <a:solidFill>
-                  <a:srgbClr val="FFFFFF"/>
+              <a:rPr sz="1200" b="0" i="0">
+                <a:solidFill>
+                  <a:srgbClr val="6B6B6B"/>
                 </a:solidFill>
                 <a:latin typeface="Calibri"/>
               </a:rPr>
@@ -17144,8 +17144,8 @@
         </p:nvSpPr>
         <p:spPr>
           <a:xfrm>
-            <a:off x="11109960" y="256032"/>
-            <a:ext cx="822960" cy="402336"/>
+            <a:off x="11841480" y="6455664"/>
+            <a:ext cx="274320" cy="274320"/>
           </a:xfrm>
           <a:prstGeom prst="rect">
             <a:avLst/>
@@ -17164,9 +17164,9 @@
               </a:spcAft>
             </a:pPr>
             <a:r>
-              <a:rPr sz="1600" b="1" i="0">
-                <a:solidFill>
-                  <a:srgbClr val="FFFFFF"/>
+              <a:rPr sz="1200" b="0" i="0">
+                <a:solidFill>
+                  <a:srgbClr val="6B6B6B"/>
                 </a:solidFill>
                 <a:latin typeface="Calibri"/>
               </a:rPr>
@@ -19549,8 +19549,8 @@
         </p:nvSpPr>
         <p:spPr>
           <a:xfrm>
-            <a:off x="11109960" y="256032"/>
-            <a:ext cx="822960" cy="402336"/>
+            <a:off x="11841480" y="6455664"/>
+            <a:ext cx="274320" cy="274320"/>
           </a:xfrm>
           <a:prstGeom prst="rect">
             <a:avLst/>
@@ -19569,9 +19569,9 @@
               </a:spcAft>
             </a:pPr>
             <a:r>
-              <a:rPr sz="1600" b="1" i="0">
-                <a:solidFill>
-                  <a:srgbClr val="FFFFFF"/>
+              <a:rPr sz="1200" b="0" i="0">
+                <a:solidFill>
+                  <a:srgbClr val="6B6B6B"/>
                 </a:solidFill>
                 <a:latin typeface="Calibri"/>
               </a:rPr>
@@ -22293,8 +22293,8 @@
         </p:nvSpPr>
         <p:spPr>
           <a:xfrm>
-            <a:off x="11109960" y="256032"/>
-            <a:ext cx="822960" cy="402336"/>
+            <a:off x="11841480" y="6455664"/>
+            <a:ext cx="274320" cy="274320"/>
           </a:xfrm>
           <a:prstGeom prst="rect">
             <a:avLst/>
@@ -22313,9 +22313,9 @@
               </a:spcAft>
             </a:pPr>
             <a:r>
-              <a:rPr sz="1600" b="1" i="0">
-                <a:solidFill>
-                  <a:srgbClr val="FFFFFF"/>
+              <a:rPr sz="1200" b="0" i="0">
+                <a:solidFill>
+                  <a:srgbClr val="6B6B6B"/>
                 </a:solidFill>
                 <a:latin typeface="Calibri"/>
               </a:rPr>
@@ -22833,8 +22833,8 @@
         </p:nvSpPr>
         <p:spPr>
           <a:xfrm>
-            <a:off x="11109960" y="256032"/>
-            <a:ext cx="822960" cy="402336"/>
+            <a:off x="11841480" y="6455664"/>
+            <a:ext cx="274320" cy="274320"/>
           </a:xfrm>
           <a:prstGeom prst="rect">
             <a:avLst/>
@@ -22853,9 +22853,9 @@
               </a:spcAft>
             </a:pPr>
             <a:r>
-              <a:rPr sz="1600" b="1" i="0">
-                <a:solidFill>
-                  <a:srgbClr val="FFFFFF"/>
+              <a:rPr sz="1200" b="0" i="0">
+                <a:solidFill>
+                  <a:srgbClr val="6B6B6B"/>
                 </a:solidFill>
                 <a:latin typeface="Calibri"/>
               </a:rPr>
@@ -23873,8 +23873,8 @@
         </p:nvSpPr>
         <p:spPr>
           <a:xfrm>
-            <a:off x="11109960" y="256032"/>
-            <a:ext cx="822960" cy="402336"/>
+            <a:off x="11841480" y="6455664"/>
+            <a:ext cx="274320" cy="274320"/>
           </a:xfrm>
           <a:prstGeom prst="rect">
             <a:avLst/>
@@ -23893,9 +23893,9 @@
               </a:spcAft>
             </a:pPr>
             <a:r>
-              <a:rPr sz="1600" b="1" i="0">
-                <a:solidFill>
-                  <a:srgbClr val="FFFFFF"/>
+              <a:rPr sz="1200" b="0" i="0">
+                <a:solidFill>
+                  <a:srgbClr val="6B6B6B"/>
                 </a:solidFill>
                 <a:latin typeface="Calibri"/>
               </a:rPr>
@@ -25205,8 +25205,8 @@
         </p:nvSpPr>
         <p:spPr>
           <a:xfrm>
-            <a:off x="11109960" y="256032"/>
-            <a:ext cx="822960" cy="402336"/>
+            <a:off x="11841480" y="6455664"/>
+            <a:ext cx="274320" cy="274320"/>
           </a:xfrm>
           <a:prstGeom prst="rect">
             <a:avLst/>
@@ -25225,9 +25225,9 @@
               </a:spcAft>
             </a:pPr>
             <a:r>
-              <a:rPr sz="1600" b="1" i="0">
-                <a:solidFill>
-                  <a:srgbClr val="FFFFFF"/>
+              <a:rPr sz="1200" b="0" i="0">
+                <a:solidFill>
+                  <a:srgbClr val="6B6B6B"/>
                 </a:solidFill>
                 <a:latin typeface="Calibri"/>
               </a:rPr>

--- a/docs/AutoBench.pptx
+++ b/docs/AutoBench.pptx
@@ -3358,7 +3358,7 @@
                 </a:solidFill>
                 <a:latin typeface="Calibri"/>
               </a:rPr>
-              <a:t>Last modified 2026-09-09 14:47 EDT</a:t>
+              <a:t>Last modified 2026-09-09 14:53 EDT</a:t>
             </a:r>
           </a:p>
         </p:txBody>
@@ -3371,8 +3371,8 @@
         </p:nvSpPr>
         <p:spPr>
           <a:xfrm>
-            <a:off x="11841480" y="6455664"/>
-            <a:ext cx="274320" cy="274320"/>
+            <a:off x="11795760" y="6437376"/>
+            <a:ext cx="320040" cy="310896"/>
           </a:xfrm>
           <a:prstGeom prst="rect">
             <a:avLst/>
@@ -3380,7 +3380,7 @@
           <a:noFill/>
         </p:spPr>
         <p:txBody>
-          <a:bodyPr wrap="square" anchor="ctr">
+          <a:bodyPr wrap="none" anchor="ctr" lIns="0" rIns="0" tIns="0" bIns="0">
             <a:spAutoFit/>
           </a:bodyPr>
           <a:lstStyle/>
@@ -4505,8 +4505,8 @@
         </p:nvSpPr>
         <p:spPr>
           <a:xfrm>
-            <a:off x="11841480" y="6455664"/>
-            <a:ext cx="274320" cy="274320"/>
+            <a:off x="11795760" y="6437376"/>
+            <a:ext cx="320040" cy="310896"/>
           </a:xfrm>
           <a:prstGeom prst="rect">
             <a:avLst/>
@@ -4514,7 +4514,7 @@
           <a:noFill/>
         </p:spPr>
         <p:txBody>
-          <a:bodyPr wrap="square" anchor="ctr">
+          <a:bodyPr wrap="none" anchor="ctr" lIns="0" rIns="0" tIns="0" bIns="0">
             <a:spAutoFit/>
           </a:bodyPr>
           <a:lstStyle/>
@@ -4961,8 +4961,8 @@
         </p:nvSpPr>
         <p:spPr>
           <a:xfrm>
-            <a:off x="11841480" y="6455664"/>
-            <a:ext cx="274320" cy="274320"/>
+            <a:off x="11795760" y="6437376"/>
+            <a:ext cx="320040" cy="310896"/>
           </a:xfrm>
           <a:prstGeom prst="rect">
             <a:avLst/>
@@ -4970,7 +4970,7 @@
           <a:noFill/>
         </p:spPr>
         <p:txBody>
-          <a:bodyPr wrap="square" anchor="ctr">
+          <a:bodyPr wrap="none" anchor="ctr" lIns="0" rIns="0" tIns="0" bIns="0">
             <a:spAutoFit/>
           </a:bodyPr>
           <a:lstStyle/>
@@ -6687,8 +6687,8 @@
         </p:nvSpPr>
         <p:spPr>
           <a:xfrm>
-            <a:off x="11841480" y="6455664"/>
-            <a:ext cx="274320" cy="274320"/>
+            <a:off x="11795760" y="6437376"/>
+            <a:ext cx="320040" cy="310896"/>
           </a:xfrm>
           <a:prstGeom prst="rect">
             <a:avLst/>
@@ -6696,7 +6696,7 @@
           <a:noFill/>
         </p:spPr>
         <p:txBody>
-          <a:bodyPr wrap="square" anchor="ctr">
+          <a:bodyPr wrap="none" anchor="ctr" lIns="0" rIns="0" tIns="0" bIns="0">
             <a:spAutoFit/>
           </a:bodyPr>
           <a:lstStyle/>
@@ -8693,8 +8693,8 @@
         </p:nvSpPr>
         <p:spPr>
           <a:xfrm>
-            <a:off x="11841480" y="6455664"/>
-            <a:ext cx="274320" cy="274320"/>
+            <a:off x="11795760" y="6437376"/>
+            <a:ext cx="320040" cy="310896"/>
           </a:xfrm>
           <a:prstGeom prst="rect">
             <a:avLst/>
@@ -8702,7 +8702,7 @@
           <a:noFill/>
         </p:spPr>
         <p:txBody>
-          <a:bodyPr wrap="square" anchor="ctr">
+          <a:bodyPr wrap="none" anchor="ctr" lIns="0" rIns="0" tIns="0" bIns="0">
             <a:spAutoFit/>
           </a:bodyPr>
           <a:lstStyle/>
@@ -11299,8 +11299,8 @@
         </p:nvSpPr>
         <p:spPr>
           <a:xfrm>
-            <a:off x="11841480" y="6455664"/>
-            <a:ext cx="274320" cy="274320"/>
+            <a:off x="11795760" y="6437376"/>
+            <a:ext cx="320040" cy="310896"/>
           </a:xfrm>
           <a:prstGeom prst="rect">
             <a:avLst/>
@@ -11308,7 +11308,7 @@
           <a:noFill/>
         </p:spPr>
         <p:txBody>
-          <a:bodyPr wrap="square" anchor="ctr">
+          <a:bodyPr wrap="none" anchor="ctr" lIns="0" rIns="0" tIns="0" bIns="0">
             <a:spAutoFit/>
           </a:bodyPr>
           <a:lstStyle/>
@@ -12403,8 +12403,8 @@
         </p:nvSpPr>
         <p:spPr>
           <a:xfrm>
-            <a:off x="11841480" y="6455664"/>
-            <a:ext cx="274320" cy="274320"/>
+            <a:off x="11795760" y="6437376"/>
+            <a:ext cx="320040" cy="310896"/>
           </a:xfrm>
           <a:prstGeom prst="rect">
             <a:avLst/>
@@ -12412,7 +12412,7 @@
           <a:noFill/>
         </p:spPr>
         <p:txBody>
-          <a:bodyPr wrap="square" anchor="ctr">
+          <a:bodyPr wrap="none" anchor="ctr" lIns="0" rIns="0" tIns="0" bIns="0">
             <a:spAutoFit/>
           </a:bodyPr>
           <a:lstStyle/>
@@ -13007,8 +13007,8 @@
         </p:nvSpPr>
         <p:spPr>
           <a:xfrm>
-            <a:off x="11841480" y="6455664"/>
-            <a:ext cx="274320" cy="274320"/>
+            <a:off x="11795760" y="6437376"/>
+            <a:ext cx="320040" cy="310896"/>
           </a:xfrm>
           <a:prstGeom prst="rect">
             <a:avLst/>
@@ -13016,7 +13016,7 @@
           <a:noFill/>
         </p:spPr>
         <p:txBody>
-          <a:bodyPr wrap="square" anchor="ctr">
+          <a:bodyPr wrap="none" anchor="ctr" lIns="0" rIns="0" tIns="0" bIns="0">
             <a:spAutoFit/>
           </a:bodyPr>
           <a:lstStyle/>
@@ -14494,8 +14494,8 @@
         </p:nvSpPr>
         <p:spPr>
           <a:xfrm>
-            <a:off x="11841480" y="6455664"/>
-            <a:ext cx="274320" cy="274320"/>
+            <a:off x="11795760" y="6437376"/>
+            <a:ext cx="320040" cy="310896"/>
           </a:xfrm>
           <a:prstGeom prst="rect">
             <a:avLst/>
@@ -14503,7 +14503,7 @@
           <a:noFill/>
         </p:spPr>
         <p:txBody>
-          <a:bodyPr wrap="square" anchor="ctr">
+          <a:bodyPr wrap="none" anchor="ctr" lIns="0" rIns="0" tIns="0" bIns="0">
             <a:spAutoFit/>
           </a:bodyPr>
           <a:lstStyle/>
@@ -15414,8 +15414,8 @@
         </p:nvSpPr>
         <p:spPr>
           <a:xfrm>
-            <a:off x="11841480" y="6455664"/>
-            <a:ext cx="274320" cy="274320"/>
+            <a:off x="11795760" y="6437376"/>
+            <a:ext cx="320040" cy="310896"/>
           </a:xfrm>
           <a:prstGeom prst="rect">
             <a:avLst/>
@@ -15423,7 +15423,7 @@
           <a:noFill/>
         </p:spPr>
         <p:txBody>
-          <a:bodyPr wrap="square" anchor="ctr">
+          <a:bodyPr wrap="none" anchor="ctr" lIns="0" rIns="0" tIns="0" bIns="0">
             <a:spAutoFit/>
           </a:bodyPr>
           <a:lstStyle/>
@@ -17144,8 +17144,8 @@
         </p:nvSpPr>
         <p:spPr>
           <a:xfrm>
-            <a:off x="11841480" y="6455664"/>
-            <a:ext cx="274320" cy="274320"/>
+            <a:off x="11795760" y="6437376"/>
+            <a:ext cx="320040" cy="310896"/>
           </a:xfrm>
           <a:prstGeom prst="rect">
             <a:avLst/>
@@ -17153,7 +17153,7 @@
           <a:noFill/>
         </p:spPr>
         <p:txBody>
-          <a:bodyPr wrap="square" anchor="ctr">
+          <a:bodyPr wrap="none" anchor="ctr" lIns="0" rIns="0" tIns="0" bIns="0">
             <a:spAutoFit/>
           </a:bodyPr>
           <a:lstStyle/>
@@ -19549,8 +19549,8 @@
         </p:nvSpPr>
         <p:spPr>
           <a:xfrm>
-            <a:off x="11841480" y="6455664"/>
-            <a:ext cx="274320" cy="274320"/>
+            <a:off x="11795760" y="6437376"/>
+            <a:ext cx="320040" cy="310896"/>
           </a:xfrm>
           <a:prstGeom prst="rect">
             <a:avLst/>
@@ -19558,7 +19558,7 @@
           <a:noFill/>
         </p:spPr>
         <p:txBody>
-          <a:bodyPr wrap="square" anchor="ctr">
+          <a:bodyPr wrap="none" anchor="ctr" lIns="0" rIns="0" tIns="0" bIns="0">
             <a:spAutoFit/>
           </a:bodyPr>
           <a:lstStyle/>
@@ -22293,8 +22293,8 @@
         </p:nvSpPr>
         <p:spPr>
           <a:xfrm>
-            <a:off x="11841480" y="6455664"/>
-            <a:ext cx="274320" cy="274320"/>
+            <a:off x="11795760" y="6437376"/>
+            <a:ext cx="320040" cy="310896"/>
           </a:xfrm>
           <a:prstGeom prst="rect">
             <a:avLst/>
@@ -22302,7 +22302,7 @@
           <a:noFill/>
         </p:spPr>
         <p:txBody>
-          <a:bodyPr wrap="square" anchor="ctr">
+          <a:bodyPr wrap="none" anchor="ctr" lIns="0" rIns="0" tIns="0" bIns="0">
             <a:spAutoFit/>
           </a:bodyPr>
           <a:lstStyle/>
@@ -22833,8 +22833,8 @@
         </p:nvSpPr>
         <p:spPr>
           <a:xfrm>
-            <a:off x="11841480" y="6455664"/>
-            <a:ext cx="274320" cy="274320"/>
+            <a:off x="11795760" y="6437376"/>
+            <a:ext cx="320040" cy="310896"/>
           </a:xfrm>
           <a:prstGeom prst="rect">
             <a:avLst/>
@@ -22842,7 +22842,7 @@
           <a:noFill/>
         </p:spPr>
         <p:txBody>
-          <a:bodyPr wrap="square" anchor="ctr">
+          <a:bodyPr wrap="none" anchor="ctr" lIns="0" rIns="0" tIns="0" bIns="0">
             <a:spAutoFit/>
           </a:bodyPr>
           <a:lstStyle/>
@@ -23873,8 +23873,8 @@
         </p:nvSpPr>
         <p:spPr>
           <a:xfrm>
-            <a:off x="11841480" y="6455664"/>
-            <a:ext cx="274320" cy="274320"/>
+            <a:off x="11795760" y="6437376"/>
+            <a:ext cx="320040" cy="310896"/>
           </a:xfrm>
           <a:prstGeom prst="rect">
             <a:avLst/>
@@ -23882,7 +23882,7 @@
           <a:noFill/>
         </p:spPr>
         <p:txBody>
-          <a:bodyPr wrap="square" anchor="ctr">
+          <a:bodyPr wrap="none" anchor="ctr" lIns="0" rIns="0" tIns="0" bIns="0">
             <a:spAutoFit/>
           </a:bodyPr>
           <a:lstStyle/>
@@ -25205,8 +25205,8 @@
         </p:nvSpPr>
         <p:spPr>
           <a:xfrm>
-            <a:off x="11841480" y="6455664"/>
-            <a:ext cx="274320" cy="274320"/>
+            <a:off x="11795760" y="6437376"/>
+            <a:ext cx="320040" cy="310896"/>
           </a:xfrm>
           <a:prstGeom prst="rect">
             <a:avLst/>
@@ -25214,7 +25214,7 @@
           <a:noFill/>
         </p:spPr>
         <p:txBody>
-          <a:bodyPr wrap="square" anchor="ctr">
+          <a:bodyPr wrap="none" anchor="ctr" lIns="0" rIns="0" tIns="0" bIns="0">
             <a:spAutoFit/>
           </a:bodyPr>
           <a:lstStyle/>

--- a/docs/AutoBench.pptx
+++ b/docs/AutoBench.pptx
@@ -3358,7 +3358,7 @@
                 </a:solidFill>
                 <a:latin typeface="Calibri"/>
               </a:rPr>
-              <a:t>Last modified 2026-09-09 14:53 EDT</a:t>
+              <a:t>Last modified 2026-09-11 16:06 EDT</a:t>
             </a:r>
           </a:p>
         </p:txBody>
@@ -4107,7 +4107,7 @@
                 </a:solidFill>
                 <a:latin typeface="Calibri"/>
               </a:rPr>
-              <a:t>• ~24 LLM calls, ~13 tool calls, ~211k input, ~4 min per task.</a:t>
+              <a:t>• ~28 LLM calls, ~14 tool calls, ~254k input, ~5 min per task.</a:t>
             </a:r>
           </a:p>
           <a:p>
@@ -4155,7 +4155,7 @@
                 </a:solidFill>
                 <a:latin typeface="Calibri"/>
               </a:rPr>
-              <a:t>• ~94% of tasks call finish: it believes it is done and the assertions disagree. No verification pass.</a:t>
+              <a:t>• ~92% of tasks call finish: it believes it is done and the assertions disagree. No verification pass.</a:t>
             </a:r>
           </a:p>
           <a:p>
@@ -6674,7 +6674,7 @@
                 </a:solidFill>
                 <a:latin typeface="Calibri"/>
               </a:rPr>
-              <a:t>Why a FIXED matrix: task selection is deterministic, so the same leg run anywhere executes the same tasks in the same order. That is what makes a difference attributable to the platform rather than to the workload — and it is why every leg deploys fresh, since reusing a warm agent silently loses telemetry. Driven by one command (reference/run-12.py, ~1h55m); the three generated documents in results/ derive every number from the mirrored artifacts.</a:t>
+              <a:t>Why a FIXED matrix: task selection is deterministic, so the same leg run anywhere executes the same tasks in the same order. That is what makes a difference attributable to the platform rather than to the workload — and it is why every leg deploys fresh, since reusing a warm agent silently loses telemetry. Driven by one command (reference/run-12.py, ~1h50m); the three generated documents in results/ derive every number from the mirrored artifacts.</a:t>
             </a:r>
           </a:p>
         </p:txBody>
@@ -6795,7 +6795,7 @@
                 </a:solidFill>
                 <a:latin typeface="Calibri"/>
               </a:rPr>
-              <a:t>v1.24 on OpenShift (Service on ykt3, workloads on ykt2) — 138 tasks, all 12 legs succeeded</a:t>
+              <a:t>v1.26 on OpenShift (Service on ykt3, workloads on ykt2) — 136 tasks, all 12 legs succeeded</a:t>
             </a:r>
           </a:p>
         </p:txBody>
@@ -7025,7 +7025,7 @@
                           </a:solidFill>
                           <a:latin typeface="Calibri"/>
                         </a:rPr>
-                        <a:t>9 s</a:t>
+                        <a:t>4 s</a:t>
                       </a:r>
                     </a:p>
                   </a:txBody>
@@ -7142,7 +7142,7 @@
                           </a:solidFill>
                           <a:latin typeface="Calibri"/>
                         </a:rPr>
-                        <a:t>42 s</a:t>
+                        <a:t>63 s</a:t>
                       </a:r>
                     </a:p>
                   </a:txBody>
@@ -7259,7 +7259,7 @@
                           </a:solidFill>
                           <a:latin typeface="Calibri"/>
                         </a:rPr>
-                        <a:t>97 s</a:t>
+                        <a:t>89 s</a:t>
                       </a:r>
                     </a:p>
                   </a:txBody>
@@ -7353,7 +7353,7 @@
                           </a:solidFill>
                           <a:latin typeface="Calibri"/>
                         </a:rPr>
-                        <a:t>0.80</a:t>
+                        <a:t>1.00</a:t>
                       </a:r>
                     </a:p>
                   </a:txBody>
@@ -7376,7 +7376,7 @@
                           </a:solidFill>
                           <a:latin typeface="Calibri"/>
                         </a:rPr>
-                        <a:t>26 s</a:t>
+                        <a:t>11 s</a:t>
                       </a:r>
                     </a:p>
                   </a:txBody>
@@ -7399,7 +7399,7 @@
                           </a:solidFill>
                           <a:latin typeface="Calibri"/>
                         </a:rPr>
-                        <a:t>3,613</a:t>
+                        <a:t>4,213</a:t>
                       </a:r>
                     </a:p>
                   </a:txBody>
@@ -7493,7 +7493,7 @@
                           </a:solidFill>
                           <a:latin typeface="Calibri"/>
                         </a:rPr>
-                        <a:t>31 s</a:t>
+                        <a:t>28 s</a:t>
                       </a:r>
                     </a:p>
                   </a:txBody>
@@ -7610,7 +7610,7 @@
                           </a:solidFill>
                           <a:latin typeface="Calibri"/>
                         </a:rPr>
-                        <a:t>35 s</a:t>
+                        <a:t>32 s</a:t>
                       </a:r>
                     </a:p>
                   </a:txBody>
@@ -7727,7 +7727,7 @@
                           </a:solidFill>
                           <a:latin typeface="Calibri"/>
                         </a:rPr>
-                        <a:t>32 s</a:t>
+                        <a:t>25 s</a:t>
                       </a:r>
                     </a:p>
                   </a:txBody>
@@ -7938,7 +7938,7 @@
                           </a:solidFill>
                           <a:latin typeface="Calibri"/>
                         </a:rPr>
-                        <a:t>0.70</a:t>
+                        <a:t>0.80</a:t>
                       </a:r>
                     </a:p>
                   </a:txBody>
@@ -7961,7 +7961,7 @@
                           </a:solidFill>
                           <a:latin typeface="Calibri"/>
                         </a:rPr>
-                        <a:t>780 s</a:t>
+                        <a:t>802 s</a:t>
                       </a:r>
                     </a:p>
                   </a:txBody>
@@ -7984,7 +7984,7 @@
                           </a:solidFill>
                           <a:latin typeface="Calibri"/>
                         </a:rPr>
-                        <a:t>852,240</a:t>
+                        <a:t>863,927</a:t>
                       </a:r>
                     </a:p>
                   </a:txBody>
@@ -8078,7 +8078,7 @@
                           </a:solidFill>
                           <a:latin typeface="Calibri"/>
                         </a:rPr>
-                        <a:t>425 s</a:t>
+                        <a:t>483 s</a:t>
                       </a:r>
                     </a:p>
                   </a:txBody>
@@ -8101,7 +8101,7 @@
                           </a:solidFill>
                           <a:latin typeface="Calibri"/>
                         </a:rPr>
-                        <a:t>1,550,718</a:t>
+                        <a:t>1,656,724</a:t>
                       </a:r>
                     </a:p>
                   </a:txBody>
@@ -8195,7 +8195,7 @@
                           </a:solidFill>
                           <a:latin typeface="Calibri"/>
                         </a:rPr>
-                        <a:t>2164 s</a:t>
+                        <a:t>1619 s</a:t>
                       </a:r>
                     </a:p>
                   </a:txBody>
@@ -8218,7 +8218,7 @@
                           </a:solidFill>
                           <a:latin typeface="Calibri"/>
                         </a:rPr>
-                        <a:t>1,988,986</a:t>
+                        <a:t>868,819</a:t>
                       </a:r>
                     </a:p>
                   </a:txBody>
@@ -8312,7 +8312,7 @@
                           </a:solidFill>
                           <a:latin typeface="Calibri"/>
                         </a:rPr>
-                        <a:t>1769 s</a:t>
+                        <a:t>1804 s</a:t>
                       </a:r>
                     </a:p>
                   </a:txBody>
@@ -8335,7 +8335,7 @@
                           </a:solidFill>
                           <a:latin typeface="Calibri"/>
                         </a:rPr>
-                        <a:t>4,009,033</a:t>
+                        <a:t>3,598,730</a:t>
                       </a:r>
                     </a:p>
                   </a:txBody>
@@ -8400,7 +8400,7 @@
                 </a:solidFill>
                 <a:latin typeface="Calibri"/>
               </a:rPr>
-              <a:t>All eight gsm8k legs pass</a:t>
+              <a:t>All eight gsm8k legs pass 1.00</a:t>
             </a:r>
           </a:p>
           <a:p>
@@ -8412,7 +8412,7 @@
                 </a:solidFill>
                 <a:latin typeface="Calibri"/>
               </a:rPr>
-              <a:t>1.00 everywhere except #4, where ONE task of five fails on the gpt-4.1 swap. The four AuthBridge presets do not change the result — only the latency.</a:t>
+              <a:t>Including #4's gpt-4.1 swap, which cost one task of five on the previous matrix. The four AuthBridge presets do not change the result — only the latency.</a:t>
             </a:r>
           </a:p>
         </p:txBody>
@@ -8479,7 +8479,7 @@
                 </a:solidFill>
                 <a:latin typeface="Calibri"/>
               </a:rPr>
-              <a:t>0.70 and 0.85. Across six samples of the same 10 tasks, four flip: at n=10 one task is worth 0.10, so this cannot resolve less than that.</a:t>
+              <a:t>0.80 and 0.85 here, 0.90 and 0.75 on KinD. Across samples of the same 10 tasks some flip: at n=10 one task is worth 0.10, so it cannot resolve less.</a:t>
             </a:r>
           </a:p>
         </p:txBody>
@@ -8546,7 +8546,7 @@
                 </a:solidFill>
                 <a:latin typeface="Calibri"/>
               </a:rPr>
-              <a:t>Runs complete, tokens record, evaluation says the goal was not met. ~94% of tasks self-declare finish.</a:t>
+              <a:t>Runs complete, tokens record, evaluation says the goal was not met. ~92% of tasks self-declare finish.</a:t>
             </a:r>
           </a:p>
         </p:txBody>
@@ -8601,7 +8601,7 @@
                 </a:solidFill>
                 <a:latin typeface="Calibri"/>
               </a:rPr>
-              <a:t>Token attribution complete: 0 of 138 rows lost</a:t>
+              <a:t>Token attribution complete: 0 of 136 rows lost</a:t>
             </a:r>
           </a:p>
           <a:p>
@@ -8613,7 +8613,7 @@
                 </a:solidFill>
                 <a:latin typeface="Calibri"/>
               </a:rPr>
-              <a:t>The previous matrix had 15 damaged rows that a tokens == 0 check reported as clean. Fresh deploy per leg, plus a structural detector.</a:t>
+              <a:t>An earlier matrix had 15 damaged rows that a tokens == 0 check reported as clean. Fresh deploy per leg, plus a structural detector.</a:t>
             </a:r>
           </a:p>
         </p:txBody>
@@ -8668,7 +8668,7 @@
                 </a:solidFill>
                 <a:latin typeface="Calibri"/>
               </a:rPr>
-              <a:t>8.4M input / 674k output tokens</a:t>
+              <a:t>7.0M input / 513k output tokens</a:t>
             </a:r>
           </a:p>
           <a:p>
@@ -8680,7 +8680,7 @@
                 </a:solidFill>
                 <a:latin typeface="Calibri"/>
               </a:rPr>
-              <a:t>over 5,438 s of wall time — appworld alone is 71% of the input, on 25 of 138 tasks.</a:t>
+              <a:t>over 4,990 s of wall time — appworld alone is 64% of the input, on 20 of 136 rows.</a:t>
             </a:r>
           </a:p>
         </p:txBody>
@@ -9545,6 +9545,29 @@
                           </a:solidFill>
                           <a:latin typeface="Calibri"/>
                         </a:rPr>
+                        <a:t>1.00</a:t>
+                      </a:r>
+                    </a:p>
+                  </a:txBody>
+                  <a:tcPr marL="63500" marR="63500" marT="12700" marB="12700" anchor="ctr">
+                    <a:solidFill>
+                      <a:srgbClr val="F4F6F8"/>
+                    </a:solidFill>
+                  </a:tcPr>
+                </a:tc>
+                <a:tc>
+                  <a:txBody>
+                    <a:bodyPr/>
+                    <a:lstStyle/>
+                    <a:p>
+                      <a:pPr algn="ctr"/>
+                      <a:r>
+                        <a:rPr sz="1000" b="0" i="0">
+                          <a:solidFill>
+                            <a:srgbClr val="1F2A37"/>
+                          </a:solidFill>
+                          <a:latin typeface="Calibri"/>
+                        </a:rPr>
                         <a:t>0.80</a:t>
                       </a:r>
                     </a:p>
@@ -9568,7 +9591,7 @@
                           </a:solidFill>
                           <a:latin typeface="Calibri"/>
                         </a:rPr>
-                        <a:t>0.80</a:t>
+                        <a:t>4,213</a:t>
                       </a:r>
                     </a:p>
                   </a:txBody>
@@ -9591,30 +9614,7 @@
                           </a:solidFill>
                           <a:latin typeface="Calibri"/>
                         </a:rPr>
-                        <a:t>3,613</a:t>
-                      </a:r>
-                    </a:p>
-                  </a:txBody>
-                  <a:tcPr marL="63500" marR="63500" marT="12700" marB="12700" anchor="ctr">
-                    <a:solidFill>
-                      <a:srgbClr val="F4F6F8"/>
-                    </a:solidFill>
-                  </a:tcPr>
-                </a:tc>
-                <a:tc>
-                  <a:txBody>
-                    <a:bodyPr/>
-                    <a:lstStyle/>
-                    <a:p>
-                      <a:pPr algn="ctr"/>
-                      <a:r>
-                        <a:rPr sz="1000" b="0" i="0">
-                          <a:solidFill>
-                            <a:srgbClr val="1F2A37"/>
-                          </a:solidFill>
-                          <a:latin typeface="Calibri"/>
-                        </a:rPr>
-                        <a:t>4,184</a:t>
+                        <a:t>3,642</a:t>
                       </a:r>
                     </a:p>
                   </a:txBody>
@@ -10360,7 +10360,7 @@
                           </a:solidFill>
                           <a:latin typeface="Calibri"/>
                         </a:rPr>
-                        <a:t>0.70</a:t>
+                        <a:t>0.80</a:t>
                       </a:r>
                     </a:p>
                   </a:txBody>
@@ -10383,7 +10383,7 @@
                           </a:solidFill>
                           <a:latin typeface="Calibri"/>
                         </a:rPr>
-                        <a:t>0.70</a:t>
+                        <a:t>0.90</a:t>
                       </a:r>
                     </a:p>
                   </a:txBody>
@@ -10406,7 +10406,7 @@
                           </a:solidFill>
                           <a:latin typeface="Calibri"/>
                         </a:rPr>
-                        <a:t>852,240</a:t>
+                        <a:t>863,927</a:t>
                       </a:r>
                     </a:p>
                   </a:txBody>
@@ -10429,7 +10429,7 @@
                           </a:solidFill>
                           <a:latin typeface="Calibri"/>
                         </a:rPr>
-                        <a:t>847,530</a:t>
+                        <a:t>910,744</a:t>
                       </a:r>
                     </a:p>
                   </a:txBody>
@@ -10546,7 +10546,7 @@
                           </a:solidFill>
                           <a:latin typeface="Calibri"/>
                         </a:rPr>
-                        <a:t>0.80</a:t>
+                        <a:t>0.75</a:t>
                       </a:r>
                     </a:p>
                   </a:txBody>
@@ -10569,7 +10569,7 @@
                           </a:solidFill>
                           <a:latin typeface="Calibri"/>
                         </a:rPr>
-                        <a:t>1,550,718</a:t>
+                        <a:t>1,656,724</a:t>
                       </a:r>
                     </a:p>
                   </a:txBody>
@@ -10592,7 +10592,7 @@
                           </a:solidFill>
                           <a:latin typeface="Calibri"/>
                         </a:rPr>
-                        <a:t>1,552,641</a:t>
+                        <a:t>1,546,050</a:t>
                       </a:r>
                     </a:p>
                   </a:txBody>
@@ -10732,7 +10732,7 @@
                           </a:solidFill>
                           <a:latin typeface="Calibri"/>
                         </a:rPr>
-                        <a:t>1,988,986</a:t>
+                        <a:t>868,819</a:t>
                       </a:r>
                     </a:p>
                   </a:txBody>
@@ -10755,7 +10755,7 @@
                           </a:solidFill>
                           <a:latin typeface="Calibri"/>
                         </a:rPr>
-                        <a:t>1,150,541</a:t>
+                        <a:t>1,071,356</a:t>
                       </a:r>
                     </a:p>
                   </a:txBody>
@@ -10895,7 +10895,7 @@
                           </a:solidFill>
                           <a:latin typeface="Calibri"/>
                         </a:rPr>
-                        <a:t>4,009,033</a:t>
+                        <a:t>3,598,730</a:t>
                       </a:r>
                     </a:p>
                   </a:txBody>
@@ -10918,7 +10918,7 @@
                           </a:solidFill>
                           <a:latin typeface="Calibri"/>
                         </a:rPr>
-                        <a:t>3,646,292</a:t>
+                        <a:t>4,376,562</a:t>
                       </a:r>
                     </a:p>
                   </a:txBody>
@@ -11006,7 +11006,7 @@
                 </a:solidFill>
                 <a:latin typeface="Calibri"/>
               </a:rPr>
-              <a:t>11 of 12 pass rates identical</a:t>
+              <a:t>9 of 12 pass rates identical</a:t>
             </a:r>
           </a:p>
           <a:p>
@@ -11018,7 +11018,7 @@
                 </a:solidFill>
                 <a:latin typeface="Calibri"/>
               </a:rPr>
-              <a:t>Only #10 differs, by one task of twenty (0.85 vs 0.80) — and tau2 is the leg we know flips run to run on either platform.</a:t>
+              <a:t>The three that differ are #4 (one gsm8k task of five) and both tau2 legs — and tau2 is the leg we know flips run to run on either platform.</a:t>
             </a:r>
           </a:p>
         </p:txBody>
@@ -11140,7 +11140,7 @@
                 </a:solidFill>
                 <a:latin typeface="Calibri"/>
               </a:rPr>
-              <a:t>Wall time is a dead heat</a:t>
+              <a:t>Wall time: 4,990 s OCP vs 5,986 s KinD</a:t>
             </a:r>
           </a:p>
           <a:p>
@@ -11152,7 +11152,7 @@
                 </a:solidFill>
                 <a:latin typeface="Calibri"/>
               </a:rPr>
-              <a:t>5,438 s on OpenShift vs 5,429 s on a single KinD node — 0.2% apart in total, though individual legs differ by up to 8x.</a:t>
+              <a:t>The single node is 20% slower overall, and individual legs differ by up to 3.4x in either direction — appworld dominates the total.</a:t>
             </a:r>
           </a:p>
         </p:txBody>
@@ -11219,7 +11219,7 @@
                 </a:solidFill>
                 <a:latin typeface="Calibri"/>
               </a:rPr>
-              <a:t>138 OCP tasks, 135 KinD tasks.</a:t>
+              <a:t>136 OCP rows, 135 KinD rows.</a:t>
             </a:r>
           </a:p>
         </p:txBody>
@@ -11435,7 +11435,7 @@
                 <a:gridCol w="1691640"/>
                 <a:gridCol w="1737360"/>
               </a:tblGrid>
-              <a:tr h="434340">
+              <a:tr h="347472">
                 <a:tc>
                   <a:txBody>
                     <a:bodyPr/>
@@ -11506,7 +11506,7 @@
                   </a:tcPr>
                 </a:tc>
               </a:tr>
-              <a:tr h="434340">
+              <a:tr h="347472">
                 <a:tc>
                   <a:txBody>
                     <a:bodyPr/>
@@ -11543,7 +11543,7 @@
                           </a:solidFill>
                           <a:latin typeface="Calibri"/>
                         </a:rPr>
-                        <a:t>~+9.5 s / task (OCP)</a:t>
+                        <a:t>+12.6 s / task (OCP)</a:t>
                       </a:r>
                     </a:p>
                   </a:txBody>
@@ -11566,7 +11566,7 @@
                           </a:solidFill>
                           <a:latin typeface="Calibri"/>
                         </a:rPr>
-                        <a:t>flat across all four presets</a:t>
+                        <a:t>flat-ish across all four presets</a:t>
                       </a:r>
                     </a:p>
                   </a:txBody>
@@ -11577,7 +11577,7 @@
                   </a:tcPr>
                 </a:tc>
               </a:tr>
-              <a:tr h="434340">
+              <a:tr h="347472">
                 <a:tc>
                   <a:txBody>
                     <a:bodyPr/>
@@ -11591,12 +11591,154 @@
                           </a:solidFill>
                           <a:latin typeface="Calibri"/>
                         </a:rPr>
+                        <a:t/>
+                      </a:r>
+                    </a:p>
+                  </a:txBody>
+                  <a:tcPr marL="63500" marR="63500" marT="12700" marB="12700" anchor="ctr">
+                    <a:solidFill>
+                      <a:srgbClr val="F4F6F8"/>
+                    </a:solidFill>
+                  </a:tcPr>
+                </a:tc>
+                <a:tc>
+                  <a:txBody>
+                    <a:bodyPr/>
+                    <a:lstStyle/>
+                    <a:p>
+                      <a:pPr algn="ctr"/>
+                      <a:r>
+                        <a:rPr sz="1050" b="0" i="0">
+                          <a:solidFill>
+                            <a:srgbClr val="1F2A37"/>
+                          </a:solidFill>
+                          <a:latin typeface="Calibri"/>
+                        </a:rPr>
+                        <a:t>+1.0 s / task (KinD)</a:t>
+                      </a:r>
+                    </a:p>
+                  </a:txBody>
+                  <a:tcPr marL="63500" marR="63500" marT="12700" marB="12700" anchor="ctr">
+                    <a:solidFill>
+                      <a:srgbClr val="F4F6F8"/>
+                    </a:solidFill>
+                  </a:tcPr>
+                </a:tc>
+                <a:tc>
+                  <a:txBody>
+                    <a:bodyPr/>
+                    <a:lstStyle/>
+                    <a:p>
+                      <a:pPr algn="ctr"/>
+                      <a:r>
+                        <a:rPr sz="1050" b="0" i="0">
+                          <a:solidFill>
+                            <a:srgbClr val="1F2A37"/>
+                          </a:solidFill>
+                          <a:latin typeface="Calibri"/>
+                        </a:rPr>
+                        <a:t>same legs, single node</a:t>
+                      </a:r>
+                    </a:p>
+                  </a:txBody>
+                  <a:tcPr marL="63500" marR="63500" marT="12700" marB="12700" anchor="ctr">
+                    <a:solidFill>
+                      <a:srgbClr val="F4F6F8"/>
+                    </a:solidFill>
+                  </a:tcPr>
+                </a:tc>
+              </a:tr>
+              <a:tr h="347472">
+                <a:tc>
+                  <a:txBody>
+                    <a:bodyPr/>
+                    <a:lstStyle/>
+                    <a:p>
+                      <a:pPr algn="l"/>
+                      <a:r>
+                        <a:rPr sz="1050" b="1" i="0">
+                          <a:solidFill>
+                            <a:srgbClr val="1F2A37"/>
+                          </a:solidFill>
+                          <a:latin typeface="Calibri"/>
+                        </a:rPr>
                         <a:t>Tool call, sidecar but unjudged</a:t>
                       </a:r>
                     </a:p>
                   </a:txBody>
                   <a:tcPr marL="63500" marR="63500" marT="12700" marB="12700" anchor="ctr">
                     <a:solidFill>
+                      <a:srgbClr val="FFFFFF"/>
+                    </a:solidFill>
+                  </a:tcPr>
+                </a:tc>
+                <a:tc>
+                  <a:txBody>
+                    <a:bodyPr/>
+                    <a:lstStyle/>
+                    <a:p>
+                      <a:pPr algn="ctr"/>
+                      <a:r>
+                        <a:rPr sz="1050" b="0" i="0">
+                          <a:solidFill>
+                            <a:srgbClr val="1F2A37"/>
+                          </a:solidFill>
+                          <a:latin typeface="Calibri"/>
+                        </a:rPr>
+                        <a:t>+1.56 s (OCP)</a:t>
+                      </a:r>
+                    </a:p>
+                  </a:txBody>
+                  <a:tcPr marL="63500" marR="63500" marT="12700" marB="12700" anchor="ctr">
+                    <a:solidFill>
+                      <a:srgbClr val="FFFFFF"/>
+                    </a:solidFill>
+                  </a:tcPr>
+                </a:tc>
+                <a:tc>
+                  <a:txBody>
+                    <a:bodyPr/>
+                    <a:lstStyle/>
+                    <a:p>
+                      <a:pPr algn="ctr"/>
+                      <a:r>
+                        <a:rPr sz="1050" b="0" i="0">
+                          <a:solidFill>
+                            <a:srgbClr val="1F2A37"/>
+                          </a:solidFill>
+                          <a:latin typeface="Calibri"/>
+                        </a:rPr>
+                        <a:t>auth-only; +0 ms on KinD</a:t>
+                      </a:r>
+                    </a:p>
+                  </a:txBody>
+                  <a:tcPr marL="63500" marR="63500" marT="12700" marB="12700" anchor="ctr">
+                    <a:solidFill>
+                      <a:srgbClr val="FFFFFF"/>
+                    </a:solidFill>
+                  </a:tcPr>
+                </a:tc>
+              </a:tr>
+              <a:tr h="347472">
+                <a:tc>
+                  <a:txBody>
+                    <a:bodyPr/>
+                    <a:lstStyle/>
+                    <a:p>
+                      <a:pPr algn="l"/>
+                      <a:r>
+                        <a:rPr sz="1050" b="1" i="0">
+                          <a:solidFill>
+                            <a:srgbClr val="1F2A37"/>
+                          </a:solidFill>
+                          <a:latin typeface="Calibri"/>
+                        </a:rPr>
+                        <a:t>Tool call, judged</a:t>
+                      </a:r>
+                    </a:p>
+                  </a:txBody>
+                  <a:tcPr marL="63500" marR="63500" marT="12700" marB="12700" anchor="ctr">
+                    <a:solidFill>
                       <a:srgbClr val="F4F6F8"/>
                     </a:solidFill>
                   </a:tcPr>
@@ -11614,7 +11756,7 @@
                           </a:solidFill>
                           <a:latin typeface="Calibri"/>
                         </a:rPr>
-                        <a:t>+0.50 s</a:t>
+                        <a:t>not isolable</a:t>
                       </a:r>
                     </a:p>
                   </a:txBody>
@@ -11637,84 +11779,13 @@
                           </a:solidFill>
                           <a:latin typeface="Calibri"/>
                         </a:rPr>
-                        <a:t>auth-only</a:t>
+                        <a:t>no leg judged all 5 calls</a:t>
                       </a:r>
                     </a:p>
                   </a:txBody>
                   <a:tcPr marL="63500" marR="63500" marT="12700" marB="12700" anchor="ctr">
                     <a:solidFill>
                       <a:srgbClr val="F4F6F8"/>
-                    </a:solidFill>
-                  </a:tcPr>
-                </a:tc>
-              </a:tr>
-              <a:tr h="434340">
-                <a:tc>
-                  <a:txBody>
-                    <a:bodyPr/>
-                    <a:lstStyle/>
-                    <a:p>
-                      <a:pPr algn="l"/>
-                      <a:r>
-                        <a:rPr sz="1050" b="1" i="0">
-                          <a:solidFill>
-                            <a:srgbClr val="1F2A37"/>
-                          </a:solidFill>
-                          <a:latin typeface="Calibri"/>
-                        </a:rPr>
-                        <a:t>Tool call, judged</a:t>
-                      </a:r>
-                    </a:p>
-                  </a:txBody>
-                  <a:tcPr marL="63500" marR="63500" marT="12700" marB="12700" anchor="ctr">
-                    <a:solidFill>
-                      <a:srgbClr val="FFFFFF"/>
-                    </a:solidFill>
-                  </a:tcPr>
-                </a:tc>
-                <a:tc>
-                  <a:txBody>
-                    <a:bodyPr/>
-                    <a:lstStyle/>
-                    <a:p>
-                      <a:pPr algn="ctr"/>
-                      <a:r>
-                        <a:rPr sz="1050" b="0" i="0">
-                          <a:solidFill>
-                            <a:srgbClr val="1F2A37"/>
-                          </a:solidFill>
-                          <a:latin typeface="Calibri"/>
-                        </a:rPr>
-                        <a:t>+1.96 s on top</a:t>
-                      </a:r>
-                    </a:p>
-                  </a:txBody>
-                  <a:tcPr marL="63500" marR="63500" marT="12700" marB="12700" anchor="ctr">
-                    <a:solidFill>
-                      <a:srgbClr val="FFFFFF"/>
-                    </a:solidFill>
-                  </a:tcPr>
-                </a:tc>
-                <a:tc>
-                  <a:txBody>
-                    <a:bodyPr/>
-                    <a:lstStyle/>
-                    <a:p>
-                      <a:pPr algn="ctr"/>
-                      <a:r>
-                        <a:rPr sz="1050" b="0" i="0">
-                          <a:solidFill>
-                            <a:srgbClr val="1F2A37"/>
-                          </a:solidFill>
-                          <a:latin typeface="Calibri"/>
-                        </a:rPr>
-                        <a:t>full + observe (all 5 judged)</a:t>
-                      </a:r>
-                    </a:p>
-                  </a:txBody>
-                  <a:tcPr marL="63500" marR="63500" marT="12700" marB="12700" anchor="ctr">
-                    <a:solidFill>
-                      <a:srgbClr val="FFFFFF"/>
                     </a:solidFill>
                   </a:tcPr>
                 </a:tc>
@@ -11732,7 +11803,7 @@
           <p:nvPr/>
         </p:nvGraphicFramePr>
         <p:xfrm>
-          <a:off x="411480" y="3246120"/>
+          <a:off x="411480" y="3429000"/>
           <a:ext cx="5806440" cy="1737360"/>
         </p:xfrm>
         <a:graphic>
@@ -11747,7 +11818,7 @@
                 <a:gridCol w="1143000"/>
                 <a:gridCol w="1143000"/>
               </a:tblGrid>
-              <a:tr h="434340">
+              <a:tr h="347472">
                 <a:tc>
                   <a:txBody>
                     <a:bodyPr/>
@@ -11761,7 +11832,7 @@
                           </a:solidFill>
                           <a:latin typeface="Calibri"/>
                         </a:rPr>
-                        <a:t/>
+                        <a:t>median span</a:t>
                       </a:r>
                     </a:p>
                   </a:txBody>
@@ -11841,7 +11912,7 @@
                   </a:tcPr>
                 </a:tc>
               </a:tr>
-              <a:tr h="434340">
+              <a:tr h="347472">
                 <a:tc>
                   <a:txBody>
                     <a:bodyPr/>
@@ -11855,12 +11926,200 @@
                           </a:solidFill>
                           <a:latin typeface="Calibri"/>
                         </a:rPr>
+                        <a:t>connect_mcp, no sidecar</a:t>
+                      </a:r>
+                    </a:p>
+                  </a:txBody>
+                  <a:tcPr marL="63500" marR="63500" marT="12700" marB="12700" anchor="ctr">
+                    <a:solidFill>
+                      <a:srgbClr val="FFFFFF"/>
+                    </a:solidFill>
+                  </a:tcPr>
+                </a:tc>
+                <a:tc>
+                  <a:txBody>
+                    <a:bodyPr/>
+                    <a:lstStyle/>
+                    <a:p>
+                      <a:pPr algn="ctr"/>
+                      <a:r>
+                        <a:rPr sz="1050" b="0" i="0">
+                          <a:solidFill>
+                            <a:srgbClr val="1F2A37"/>
+                          </a:solidFill>
+                          <a:latin typeface="Calibri"/>
+                        </a:rPr>
+                        <a:t>424 ms</a:t>
+                      </a:r>
+                    </a:p>
+                  </a:txBody>
+                  <a:tcPr marL="63500" marR="63500" marT="12700" marB="12700" anchor="ctr">
+                    <a:solidFill>
+                      <a:srgbClr val="FFFFFF"/>
+                    </a:solidFill>
+                  </a:tcPr>
+                </a:tc>
+                <a:tc>
+                  <a:txBody>
+                    <a:bodyPr/>
+                    <a:lstStyle/>
+                    <a:p>
+                      <a:pPr algn="ctr"/>
+                      <a:r>
+                        <a:rPr sz="1050" b="0" i="0">
+                          <a:solidFill>
+                            <a:srgbClr val="1F2A37"/>
+                          </a:solidFill>
+                          <a:latin typeface="Calibri"/>
+                        </a:rPr>
+                        <a:t>79 ms</a:t>
+                      </a:r>
+                    </a:p>
+                  </a:txBody>
+                  <a:tcPr marL="63500" marR="63500" marT="12700" marB="12700" anchor="ctr">
+                    <a:solidFill>
+                      <a:srgbClr val="FFFFFF"/>
+                    </a:solidFill>
+                  </a:tcPr>
+                </a:tc>
+                <a:tc>
+                  <a:txBody>
+                    <a:bodyPr/>
+                    <a:lstStyle/>
+                    <a:p>
+                      <a:pPr algn="ctr"/>
+                      <a:r>
+                        <a:rPr sz="1050" b="0" i="0">
+                          <a:solidFill>
+                            <a:srgbClr val="1F2A37"/>
+                          </a:solidFill>
+                          <a:latin typeface="Calibri"/>
+                        </a:rPr>
+                        <a:t>5.4x</a:t>
+                      </a:r>
+                    </a:p>
+                  </a:txBody>
+                  <a:tcPr marL="63500" marR="63500" marT="12700" marB="12700" anchor="ctr">
+                    <a:solidFill>
+                      <a:srgbClr val="FFFFFF"/>
+                    </a:solidFill>
+                  </a:tcPr>
+                </a:tc>
+              </a:tr>
+              <a:tr h="347472">
+                <a:tc>
+                  <a:txBody>
+                    <a:bodyPr/>
+                    <a:lstStyle/>
+                    <a:p>
+                      <a:pPr algn="l"/>
+                      <a:r>
+                        <a:rPr sz="1050" b="1" i="0">
+                          <a:solidFill>
+                            <a:srgbClr val="1F2A37"/>
+                          </a:solidFill>
+                          <a:latin typeface="Calibri"/>
+                        </a:rPr>
                         <a:t>connect_mcp with sidecar</a:t>
                       </a:r>
                     </a:p>
                   </a:txBody>
                   <a:tcPr marL="63500" marR="63500" marT="12700" marB="12700" anchor="ctr">
                     <a:solidFill>
+                      <a:srgbClr val="F4F6F8"/>
+                    </a:solidFill>
+                  </a:tcPr>
+                </a:tc>
+                <a:tc>
+                  <a:txBody>
+                    <a:bodyPr/>
+                    <a:lstStyle/>
+                    <a:p>
+                      <a:pPr algn="ctr"/>
+                      <a:r>
+                        <a:rPr sz="1050" b="0" i="0">
+                          <a:solidFill>
+                            <a:srgbClr val="1F2A37"/>
+                          </a:solidFill>
+                          <a:latin typeface="Calibri"/>
+                        </a:rPr>
+                        <a:t>3200 ms</a:t>
+                      </a:r>
+                    </a:p>
+                  </a:txBody>
+                  <a:tcPr marL="63500" marR="63500" marT="12700" marB="12700" anchor="ctr">
+                    <a:solidFill>
+                      <a:srgbClr val="F4F6F8"/>
+                    </a:solidFill>
+                  </a:tcPr>
+                </a:tc>
+                <a:tc>
+                  <a:txBody>
+                    <a:bodyPr/>
+                    <a:lstStyle/>
+                    <a:p>
+                      <a:pPr algn="ctr"/>
+                      <a:r>
+                        <a:rPr sz="1050" b="0" i="0">
+                          <a:solidFill>
+                            <a:srgbClr val="1F2A37"/>
+                          </a:solidFill>
+                          <a:latin typeface="Calibri"/>
+                        </a:rPr>
+                        <a:t>131 ms</a:t>
+                      </a:r>
+                    </a:p>
+                  </a:txBody>
+                  <a:tcPr marL="63500" marR="63500" marT="12700" marB="12700" anchor="ctr">
+                    <a:solidFill>
+                      <a:srgbClr val="F4F6F8"/>
+                    </a:solidFill>
+                  </a:tcPr>
+                </a:tc>
+                <a:tc>
+                  <a:txBody>
+                    <a:bodyPr/>
+                    <a:lstStyle/>
+                    <a:p>
+                      <a:pPr algn="ctr"/>
+                      <a:r>
+                        <a:rPr sz="1050" b="0" i="0">
+                          <a:solidFill>
+                            <a:srgbClr val="1F2A37"/>
+                          </a:solidFill>
+                          <a:latin typeface="Calibri"/>
+                        </a:rPr>
+                        <a:t>24.4x</a:t>
+                      </a:r>
+                    </a:p>
+                  </a:txBody>
+                  <a:tcPr marL="63500" marR="63500" marT="12700" marB="12700" anchor="ctr">
+                    <a:solidFill>
+                      <a:srgbClr val="F4F6F8"/>
+                    </a:solidFill>
+                  </a:tcPr>
+                </a:tc>
+              </a:tr>
+              <a:tr h="347472">
+                <a:tc>
+                  <a:txBody>
+                    <a:bodyPr/>
+                    <a:lstStyle/>
+                    <a:p>
+                      <a:pPr algn="l"/>
+                      <a:r>
+                        <a:rPr sz="1050" b="1" i="0">
+                          <a:solidFill>
+                            <a:srgbClr val="1F2A37"/>
+                          </a:solidFill>
+                          <a:latin typeface="Calibri"/>
+                        </a:rPr>
+                        <a:t>tool call, unjudged</a:t>
+                      </a:r>
+                    </a:p>
+                  </a:txBody>
+                  <a:tcPr marL="63500" marR="63500" marT="12700" marB="12700" anchor="ctr">
+                    <a:solidFill>
                       <a:srgbClr val="FFFFFF"/>
                     </a:solidFill>
                   </a:tcPr>
@@ -11878,7 +12137,7 @@
                           </a:solidFill>
                           <a:latin typeface="Calibri"/>
                         </a:rPr>
-                        <a:t>3131 ms</a:t>
+                        <a:t>1657 ms</a:t>
                       </a:r>
                     </a:p>
                   </a:txBody>
@@ -11901,7 +12160,7 @@
                           </a:solidFill>
                           <a:latin typeface="Calibri"/>
                         </a:rPr>
-                        <a:t>168 ms</a:t>
+                        <a:t>11 ms</a:t>
                       </a:r>
                     </a:p>
                   </a:txBody>
@@ -11924,7 +12183,7 @@
                           </a:solidFill>
                           <a:latin typeface="Calibri"/>
                         </a:rPr>
-                        <a:t>18.6x</a:t>
+                        <a:t>150.6x</a:t>
                       </a:r>
                     </a:p>
                   </a:txBody>
@@ -11935,7 +12194,7 @@
                   </a:tcPr>
                 </a:tc>
               </a:tr>
-              <a:tr h="434340">
+              <a:tr h="347472">
                 <a:tc>
                   <a:txBody>
                     <a:bodyPr/>
@@ -11949,7 +12208,7 @@
                           </a:solidFill>
                           <a:latin typeface="Calibri"/>
                         </a:rPr>
-                        <a:t>tool call, unjudged</a:t>
+                        <a:t>tool call, judged</a:t>
                       </a:r>
                     </a:p>
                   </a:txBody>
@@ -11972,7 +12231,7 @@
                           </a:solidFill>
                           <a:latin typeface="Calibri"/>
                         </a:rPr>
-                        <a:t>545 ms</a:t>
+                        <a:t>4689 ms</a:t>
                       </a:r>
                     </a:p>
                   </a:txBody>
@@ -11995,7 +12254,7 @@
                           </a:solidFill>
                           <a:latin typeface="Calibri"/>
                         </a:rPr>
-                        <a:t>13 ms</a:t>
+                        <a:t>1306 ms</a:t>
                       </a:r>
                     </a:p>
                   </a:txBody>
@@ -12018,107 +12277,13 @@
                           </a:solidFill>
                           <a:latin typeface="Calibri"/>
                         </a:rPr>
-                        <a:t>41.1x</a:t>
+                        <a:t>3.6x</a:t>
                       </a:r>
                     </a:p>
                   </a:txBody>
                   <a:tcPr marL="63500" marR="63500" marT="12700" marB="12700" anchor="ctr">
                     <a:solidFill>
                       <a:srgbClr val="F4F6F8"/>
-                    </a:solidFill>
-                  </a:tcPr>
-                </a:tc>
-              </a:tr>
-              <a:tr h="434340">
-                <a:tc>
-                  <a:txBody>
-                    <a:bodyPr/>
-                    <a:lstStyle/>
-                    <a:p>
-                      <a:pPr algn="l"/>
-                      <a:r>
-                        <a:rPr sz="1050" b="1" i="0">
-                          <a:solidFill>
-                            <a:srgbClr val="1F2A37"/>
-                          </a:solidFill>
-                          <a:latin typeface="Calibri"/>
-                        </a:rPr>
-                        <a:t>tool call, judged</a:t>
-                      </a:r>
-                    </a:p>
-                  </a:txBody>
-                  <a:tcPr marL="63500" marR="63500" marT="12700" marB="12700" anchor="ctr">
-                    <a:solidFill>
-                      <a:srgbClr val="FFFFFF"/>
-                    </a:solidFill>
-                  </a:tcPr>
-                </a:tc>
-                <a:tc>
-                  <a:txBody>
-                    <a:bodyPr/>
-                    <a:lstStyle/>
-                    <a:p>
-                      <a:pPr algn="ctr"/>
-                      <a:r>
-                        <a:rPr sz="1050" b="0" i="0">
-                          <a:solidFill>
-                            <a:srgbClr val="1F2A37"/>
-                          </a:solidFill>
-                          <a:latin typeface="Calibri"/>
-                        </a:rPr>
-                        <a:t>2507 ms</a:t>
-                      </a:r>
-                    </a:p>
-                  </a:txBody>
-                  <a:tcPr marL="63500" marR="63500" marT="12700" marB="12700" anchor="ctr">
-                    <a:solidFill>
-                      <a:srgbClr val="FFFFFF"/>
-                    </a:solidFill>
-                  </a:tcPr>
-                </a:tc>
-                <a:tc>
-                  <a:txBody>
-                    <a:bodyPr/>
-                    <a:lstStyle/>
-                    <a:p>
-                      <a:pPr algn="ctr"/>
-                      <a:r>
-                        <a:rPr sz="1050" b="0" i="0">
-                          <a:solidFill>
-                            <a:srgbClr val="1F2A37"/>
-                          </a:solidFill>
-                          <a:latin typeface="Calibri"/>
-                        </a:rPr>
-                        <a:t>1167 ms</a:t>
-                      </a:r>
-                    </a:p>
-                  </a:txBody>
-                  <a:tcPr marL="63500" marR="63500" marT="12700" marB="12700" anchor="ctr">
-                    <a:solidFill>
-                      <a:srgbClr val="FFFFFF"/>
-                    </a:solidFill>
-                  </a:tcPr>
-                </a:tc>
-                <a:tc>
-                  <a:txBody>
-                    <a:bodyPr/>
-                    <a:lstStyle/>
-                    <a:p>
-                      <a:pPr algn="ctr"/>
-                      <a:r>
-                        <a:rPr sz="1050" b="0" i="0">
-                          <a:solidFill>
-                            <a:srgbClr val="1F2A37"/>
-                          </a:solidFill>
-                          <a:latin typeface="Calibri"/>
-                        </a:rPr>
-                        <a:t>2.1x</a:t>
-                      </a:r>
-                    </a:p>
-                  </a:txBody>
-                  <a:tcPr marL="63500" marR="63500" marT="12700" marB="12700" anchor="ctr">
-                    <a:solidFill>
-                      <a:srgbClr val="FFFFFF"/>
                     </a:solidFill>
                   </a:tcPr>
                 </a:tc>
@@ -12256,7 +12421,7 @@
                 </a:solidFill>
                 <a:latin typeface="Calibri"/>
               </a:rPr>
-              <a:t>The judged-call cost is comparable across platforms (2.1x) because it is dominated by a shared external gateway. The fixed cost is 8x apart because this OCP matrix is cross-cluster — token exchange over external routes. Do NOT quote +9.5 s as “the cost of AuthBridge”; the single-node figures (~+1.2 s fixed, ~+1.1 s per judged call) are the better estimate.</a:t>
+              <a:t>The judged-call cost is broadly comparable across platforms (3.6x) because it is dominated by a shared external gateway. The fixed cost is 13x apart because this OCP matrix is cross-cluster — token exchange over external routes. Do NOT quote +12.6 s as “the cost of AuthBridge”; the single-node figure (~+1.0 s fixed) is the better estimate of the intrinsic cost.</a:t>
             </a:r>
           </a:p>
         </p:txBody>
@@ -12323,7 +12488,7 @@
                 </a:solidFill>
                 <a:latin typeface="Calibri"/>
               </a:rPr>
-              <a:t>Only 1 of 6 IBAC legs authorized all of its tool calls: OCP judged 4/5, 3/5, 5/5 and KinD 3/5, 4/5, 3/5. A leg that judged fewer calls shows a lower median — a mixture, not a saving. Whether that is decision caching under concurrency or a fail-open gap is still OPEN; the test is one ibac-only leg at parallelism 1.</a:t>
+              <a:t>NOT ONE of the six IBAC legs authorized all of its tool calls: OCP judged 4/5, 3/5, 4/5 and KinD 3/5, 2/5, 3/5. A leg that judged fewer calls shows a lower median — a mixture, not a saving, which is why the judged-call cost cannot be isolated at all from this matrix. Decision caching under concurrency, or a fail-open hole? Still OPEN; the test is one ibac-only leg at parallelism 1.</a:t>
             </a:r>
           </a:p>
         </p:txBody>
@@ -24235,7 +24400,7 @@
                           </a:solidFill>
                           <a:latin typeface="Calibri"/>
                         </a:rPr>
-                        <a:t>172</a:t>
+                        <a:t>172 (all clean)</a:t>
                       </a:r>
                     </a:p>
                   </a:txBody>
@@ -24258,7 +24423,7 @@
                           </a:solidFill>
                           <a:latin typeface="Calibri"/>
                         </a:rPr>
-                        <a:t>60 (50 clean)</a:t>
+                        <a:t>60 (all clean)</a:t>
                       </a:r>
                     </a:p>
                   </a:txBody>
@@ -24281,7 +24446,7 @@
                           </a:solidFill>
                           <a:latin typeface="Calibri"/>
                         </a:rPr>
-                        <a:t>40 (35 clean)</a:t>
+                        <a:t>39 (all clean)</a:t>
                       </a:r>
                     </a:p>
                   </a:txBody>
@@ -24329,7 +24494,7 @@
                           </a:solidFill>
                           <a:latin typeface="Calibri"/>
                         </a:rPr>
-                        <a:t>0.98</a:t>
+                        <a:t>0.99</a:t>
                       </a:r>
                     </a:p>
                   </a:txBody>
@@ -24352,7 +24517,7 @@
                           </a:solidFill>
                           <a:latin typeface="Calibri"/>
                         </a:rPr>
-                        <a:t>0.83</a:t>
+                        <a:t>0.82</a:t>
                       </a:r>
                     </a:p>
                   </a:txBody>
@@ -24423,7 +24588,7 @@
                           </a:solidFill>
                           <a:latin typeface="Calibri"/>
                         </a:rPr>
-                        <a:t>343</a:t>
+                        <a:t>341</a:t>
                       </a:r>
                     </a:p>
                   </a:txBody>
@@ -24446,7 +24611,7 @@
                           </a:solidFill>
                           <a:latin typeface="Calibri"/>
                         </a:rPr>
-                        <a:t>82,966</a:t>
+                        <a:t>82,957</a:t>
                       </a:r>
                     </a:p>
                   </a:txBody>
@@ -24469,7 +24634,7 @@
                           </a:solidFill>
                           <a:latin typeface="Calibri"/>
                         </a:rPr>
-                        <a:t>210,792</a:t>
+                        <a:t>254,243</a:t>
                       </a:r>
                     </a:p>
                   </a:txBody>
@@ -24517,7 +24682,7 @@
                           </a:solidFill>
                           <a:latin typeface="Calibri"/>
                         </a:rPr>
-                        <a:t>205</a:t>
+                        <a:t>192</a:t>
                       </a:r>
                     </a:p>
                   </a:txBody>
@@ -24540,7 +24705,7 @@
                           </a:solidFill>
                           <a:latin typeface="Calibri"/>
                         </a:rPr>
-                        <a:t>1,955</a:t>
+                        <a:t>1,969</a:t>
                       </a:r>
                     </a:p>
                   </a:txBody>
@@ -24563,7 +24728,7 @@
                           </a:solidFill>
                           <a:latin typeface="Calibri"/>
                         </a:rPr>
-                        <a:t>21,499</a:t>
+                        <a:t>24,157</a:t>
                       </a:r>
                     </a:p>
                   </a:txBody>
@@ -24634,7 +24799,7 @@
                           </a:solidFill>
                           <a:latin typeface="Calibri"/>
                         </a:rPr>
-                        <a:t>11.4</a:t>
+                        <a:t>11.1</a:t>
                       </a:r>
                     </a:p>
                   </a:txBody>
@@ -24657,7 +24822,7 @@
                           </a:solidFill>
                           <a:latin typeface="Calibri"/>
                         </a:rPr>
-                        <a:t>23.6</a:t>
+                        <a:t>28.3</a:t>
                       </a:r>
                     </a:p>
                   </a:txBody>
@@ -24751,7 +24916,7 @@
                           </a:solidFill>
                           <a:latin typeface="Calibri"/>
                         </a:rPr>
-                        <a:t>13.4</a:t>
+                        <a:t>13.6</a:t>
                       </a:r>
                     </a:p>
                   </a:txBody>
@@ -24799,7 +24964,7 @@
                           </a:solidFill>
                           <a:latin typeface="Calibri"/>
                         </a:rPr>
-                        <a:t>5.3 s</a:t>
+                        <a:t>7.7 s</a:t>
                       </a:r>
                     </a:p>
                   </a:txBody>
@@ -24822,7 +24987,7 @@
                           </a:solidFill>
                           <a:latin typeface="Calibri"/>
                         </a:rPr>
-                        <a:t>92 s</a:t>
+                        <a:t>97 s</a:t>
                       </a:r>
                     </a:p>
                   </a:txBody>
@@ -24845,7 +25010,7 @@
                           </a:solidFill>
                           <a:latin typeface="Calibri"/>
                         </a:rPr>
-                        <a:t>232 s</a:t>
+                        <a:t>290 s</a:t>
                       </a:r>
                     </a:p>
                   </a:txBody>
@@ -24893,7 +25058,7 @@
                           </a:solidFill>
                           <a:latin typeface="Calibri"/>
                         </a:rPr>
-                        <a:t>62 s</a:t>
+                        <a:t>29 s</a:t>
                       </a:r>
                     </a:p>
                   </a:txBody>
@@ -24916,7 +25081,7 @@
                           </a:solidFill>
                           <a:latin typeface="Calibri"/>
                         </a:rPr>
-                        <a:t>425 s</a:t>
+                        <a:t>181 s</a:t>
                       </a:r>
                     </a:p>
                   </a:txBody>
@@ -24939,7 +25104,7 @@
                           </a:solidFill>
                           <a:latin typeface="Calibri"/>
                         </a:rPr>
-                        <a:t>581 s</a:t>
+                        <a:t>596 s</a:t>
                       </a:r>
                     </a:p>
                   </a:txBody>
@@ -25192,7 +25357,7 @@
                 </a:solidFill>
                 <a:latin typeface="Calibri"/>
               </a:rPr>
-              <a:t>The scale gap is the headline: a tau2 task costs ~240x the input tokens of a gsm8k task, an appworld task ~615x. A 50-task gsm8k run is minutes; a 20-task appworld run is half an hour and millions of tokens. Budget by benchmark, not by task count.</a:t>
+              <a:t>The scale gap is the headline: a tau2 task costs ~245x the input tokens of a gsm8k task, an appworld task ~745x. A 50-task gsm8k run is minutes; a 20-task appworld run is half an hour and millions of tokens. Budget by benchmark, not by task count.</a:t>
             </a:r>
           </a:p>
         </p:txBody>

--- a/docs/AutoBench.pptx
+++ b/docs/AutoBench.pptx
@@ -3095,7 +3095,7 @@
 
 <file path=ppt/slides/slide1.xml><?xml version="1.0" encoding="utf-8"?>
 <p:sld xmlns:a="http://schemas.openxmlformats.org/drawingml/2006/main" xmlns:p="http://schemas.openxmlformats.org/presentationml/2006/main" xmlns:r="http://schemas.openxmlformats.org/officeDocument/2006/relationships">
-  <p:cSld>
+  <p:cSld name="AutoBench">
     <p:spTree>
       <p:nvGrpSpPr>
         <p:cNvPr id="1" name=""/>
@@ -3358,7 +3358,7 @@
                 </a:solidFill>
                 <a:latin typeface="Calibri"/>
               </a:rPr>
-              <a:t>Last modified 2026-09-11 16:06 EDT</a:t>
+              <a:t>Last modified 2026-09-11 21:53 EDT</a:t>
             </a:r>
           </a:p>
         </p:txBody>
@@ -3412,7 +3412,7 @@
 
 <file path=ppt/slides/slide10.xml><?xml version="1.0" encoding="utf-8"?>
 <p:sld xmlns:a="http://schemas.openxmlformats.org/drawingml/2006/main" xmlns:p="http://schemas.openxmlformats.org/presentationml/2006/main" xmlns:r="http://schemas.openxmlformats.org/officeDocument/2006/relationships">
-  <p:cSld>
+  <p:cSld name="7.2 What Each Benchmark Stresses">
     <p:spTree>
       <p:nvGrpSpPr>
         <p:cNvPr id="1" name=""/>
@@ -4546,7 +4546,7 @@
 
 <file path=ppt/slides/slide11.xml><?xml version="1.0" encoding="utf-8"?>
 <p:sld xmlns:a="http://schemas.openxmlformats.org/drawingml/2006/main" xmlns:p="http://schemas.openxmlformats.org/presentationml/2006/main" xmlns:r="http://schemas.openxmlformats.org/officeDocument/2006/relationships">
-  <p:cSld>
+  <p:cSld name="7.3 Reading the Numbers — Five Things That Mislead">
     <p:spTree>
       <p:nvGrpSpPr>
         <p:cNvPr id="1" name=""/>
@@ -5002,7 +5002,7 @@
 
 <file path=ppt/slides/slide12.xml><?xml version="1.0" encoding="utf-8"?>
 <p:sld xmlns:a="http://schemas.openxmlformats.org/drawingml/2006/main" xmlns:p="http://schemas.openxmlformats.org/presentationml/2006/main" xmlns:r="http://schemas.openxmlformats.org/officeDocument/2006/relationships">
-  <p:cSld>
+  <p:cSld name="8.1 The Canonical 12-Run Matrix">
     <p:spTree>
       <p:nvGrpSpPr>
         <p:cNvPr id="1" name=""/>
@@ -6728,7 +6728,7 @@
 
 <file path=ppt/slides/slide13.xml><?xml version="1.0" encoding="utf-8"?>
 <p:sld xmlns:a="http://schemas.openxmlformats.org/drawingml/2006/main" xmlns:p="http://schemas.openxmlformats.org/presentationml/2006/main" xmlns:r="http://schemas.openxmlformats.org/officeDocument/2006/relationships">
-  <p:cSld>
+  <p:cSld name="8.2 What the 12 Runs Measured">
     <p:spTree>
       <p:nvGrpSpPr>
         <p:cNvPr id="1" name=""/>
@@ -8734,7 +8734,7 @@
 
 <file path=ppt/slides/slide14.xml><?xml version="1.0" encoding="utf-8"?>
 <p:sld xmlns:a="http://schemas.openxmlformats.org/drawingml/2006/main" xmlns:p="http://schemas.openxmlformats.org/presentationml/2006/main" xmlns:r="http://schemas.openxmlformats.org/officeDocument/2006/relationships">
-  <p:cSld>
+  <p:cSld name="9.1 OpenShift vs KinD — Like-for-Like">
     <p:spTree>
       <p:nvGrpSpPr>
         <p:cNvPr id="1" name=""/>
@@ -11340,7 +11340,7 @@
 
 <file path=ppt/slides/slide15.xml><?xml version="1.0" encoding="utf-8"?>
 <p:sld xmlns:a="http://schemas.openxmlformats.org/drawingml/2006/main" xmlns:p="http://schemas.openxmlformats.org/presentationml/2006/main" xmlns:r="http://schemas.openxmlformats.org/officeDocument/2006/relationships">
-  <p:cSld>
+  <p:cSld name="9.2 What AuthBridge Costs">
     <p:spTree>
       <p:nvGrpSpPr>
         <p:cNvPr id="1" name=""/>
@@ -12609,7 +12609,7 @@
 
 <file path=ppt/slides/slide16.xml><?xml version="1.0" encoding="utf-8"?>
 <p:sld xmlns:a="http://schemas.openxmlformats.org/drawingml/2006/main" xmlns:p="http://schemas.openxmlformats.org/presentationml/2006/main" xmlns:r="http://schemas.openxmlformats.org/officeDocument/2006/relationships">
-  <p:cSld>
+  <p:cSld name="10. What the Service Can &amp; Cannot Enact">
     <p:spTree>
       <p:nvGrpSpPr>
         <p:cNvPr id="1" name=""/>
@@ -13213,7 +13213,7 @@
 
 <file path=ppt/slides/slide2.xml><?xml version="1.0" encoding="utf-8"?>
 <p:sld xmlns:a="http://schemas.openxmlformats.org/drawingml/2006/main" xmlns:p="http://schemas.openxmlformats.org/presentationml/2006/main" xmlns:r="http://schemas.openxmlformats.org/officeDocument/2006/relationships">
-  <p:cSld>
+  <p:cSld name="Agenda">
     <p:spTree>
       <p:nvGrpSpPr>
         <p:cNvPr id="1" name=""/>
@@ -14700,7 +14700,7 @@
 
 <file path=ppt/slides/slide3.xml><?xml version="1.0" encoding="utf-8"?>
 <p:sld xmlns:a="http://schemas.openxmlformats.org/drawingml/2006/main" xmlns:p="http://schemas.openxmlformats.org/presentationml/2006/main" xmlns:r="http://schemas.openxmlformats.org/officeDocument/2006/relationships">
-  <p:cSld>
+  <p:cSld name="1. Overview &amp; Key Design Decisions">
     <p:spTree>
       <p:nvGrpSpPr>
         <p:cNvPr id="1" name=""/>
@@ -15620,7 +15620,7 @@
 
 <file path=ppt/slides/slide4.xml><?xml version="1.0" encoding="utf-8"?>
 <p:sld xmlns:a="http://schemas.openxmlformats.org/drawingml/2006/main" xmlns:p="http://schemas.openxmlformats.org/presentationml/2006/main" xmlns:r="http://schemas.openxmlformats.org/officeDocument/2006/relationships">
-  <p:cSld>
+  <p:cSld name="2. Auto-Benchmarking Design Motif">
     <p:spTree>
       <p:nvGrpSpPr>
         <p:cNvPr id="1" name=""/>
@@ -17350,7 +17350,7 @@
 
 <file path=ppt/slides/slide5.xml><?xml version="1.0" encoding="utf-8"?>
 <p:sld xmlns:a="http://schemas.openxmlformats.org/drawingml/2006/main" xmlns:p="http://schemas.openxmlformats.org/presentationml/2006/main" xmlns:r="http://schemas.openxmlformats.org/officeDocument/2006/relationships">
-  <p:cSld>
+  <p:cSld name="3. Architecture">
     <p:spTree>
       <p:nvGrpSpPr>
         <p:cNvPr id="1" name=""/>
@@ -19755,7 +19755,7 @@
 
 <file path=ppt/slides/slide6.xml><?xml version="1.0" encoding="utf-8"?>
 <p:sld xmlns:a="http://schemas.openxmlformats.org/drawingml/2006/main" xmlns:p="http://schemas.openxmlformats.org/presentationml/2006/main" xmlns:r="http://schemas.openxmlformats.org/officeDocument/2006/relationships">
-  <p:cSld>
+  <p:cSld name="4. Architecture with Workload Specific Components">
     <p:spTree>
       <p:nvGrpSpPr>
         <p:cNvPr id="1" name=""/>
@@ -22499,7 +22499,7 @@
 
 <file path=ppt/slides/slide7.xml><?xml version="1.0" encoding="utf-8"?>
 <p:sld xmlns:a="http://schemas.openxmlformats.org/drawingml/2006/main" xmlns:p="http://schemas.openxmlformats.org/presentationml/2006/main" xmlns:r="http://schemas.openxmlformats.org/officeDocument/2006/relationships">
-  <p:cSld>
+  <p:cSld name="5. The Two-Token Auth Model">
     <p:spTree>
       <p:nvGrpSpPr>
         <p:cNvPr id="1" name=""/>
@@ -23039,7 +23039,7 @@
 
 <file path=ppt/slides/slide8.xml><?xml version="1.0" encoding="utf-8"?>
 <p:sld xmlns:a="http://schemas.openxmlformats.org/drawingml/2006/main" xmlns:p="http://schemas.openxmlformats.org/presentationml/2006/main" xmlns:r="http://schemas.openxmlformats.org/officeDocument/2006/relationships">
-  <p:cSld>
+  <p:cSld name="6. Benchmark Catalog &amp; Run Lifecycle">
     <p:spTree>
       <p:nvGrpSpPr>
         <p:cNvPr id="1" name=""/>
@@ -24079,7 +24079,7 @@
 
 <file path=ppt/slides/slide9.xml><?xml version="1.0" encoding="utf-8"?>
 <p:sld xmlns:a="http://schemas.openxmlformats.org/drawingml/2006/main" xmlns:p="http://schemas.openxmlformats.org/presentationml/2006/main" xmlns:r="http://schemas.openxmlformats.org/officeDocument/2006/relationships">
-  <p:cSld>
+  <p:cSld name="7.1 The Three Benchmarks — a Difficulty Ladder">
     <p:spTree>
       <p:nvGrpSpPr>
         <p:cNvPr id="1" name=""/>

--- a/docs/AutoBench.pptx
+++ b/docs/AutoBench.pptx
@@ -3358,7 +3358,7 @@
                 </a:solidFill>
                 <a:latin typeface="Calibri"/>
               </a:rPr>
-              <a:t>Last modified 2026-09-11 21:53 EDT</a:t>
+              <a:t>Last modified 2026-09-11 22:06 EDT</a:t>
             </a:r>
           </a:p>
         </p:txBody>
@@ -17350,7 +17350,7 @@
 
 <file path=ppt/slides/slide5.xml><?xml version="1.0" encoding="utf-8"?>
 <p:sld xmlns:a="http://schemas.openxmlformats.org/drawingml/2006/main" xmlns:p="http://schemas.openxmlformats.org/presentationml/2006/main" xmlns:r="http://schemas.openxmlformats.org/officeDocument/2006/relationships">
-  <p:cSld name="3. Architecture">
+  <p:cSld name="3. Implementation Architecture: Kubernetes-Based Benchmark Workloads">
     <p:spTree>
       <p:nvGrpSpPr>
         <p:cNvPr id="1" name=""/>
@@ -17406,7 +17406,7 @@
                 </a:solidFill>
                 <a:latin typeface="Calibri"/>
               </a:rPr>
-              <a:t>3.  Architecture</a:t>
+              <a:t>3.  Implementation Architecture: Kubernetes-Based Benchmark Workloads</a:t>
             </a:r>
           </a:p>
           <a:p>
